--- a/lecons/F4/40_F4_M2_L30_The_Impact_of_Agriculture.pptx
+++ b/lecons/F4/40_F4_M2_L30_The_Impact_of_Agriculture.pptx
@@ -13167,7 +13167,7 @@
         <p:spPr>
           <a:xfrm>
             <a:off x="0" y="658368"/>
-            <a:ext cx="2468880" cy="5833872"/>
+            <a:ext cx="5120640" cy="5833872"/>
           </a:xfrm>
           <a:prstGeom prst="rect">
             <a:avLst/>
@@ -13182,8 +13182,8 @@
         </p:nvSpPr>
         <p:spPr>
           <a:xfrm>
-            <a:off x="2697480" y="1005840"/>
-            <a:ext cx="9174175" cy="731520"/>
+            <a:off x="5349240" y="1005840"/>
+            <a:ext cx="6522415" cy="731520"/>
           </a:xfrm>
           <a:prstGeom prst="rect">
             <a:avLst/>
@@ -13223,8 +13223,8 @@
         </p:nvSpPr>
         <p:spPr>
           <a:xfrm>
-            <a:off x="2697480" y="1783080"/>
-            <a:ext cx="9174175" cy="4663440"/>
+            <a:off x="5349240" y="1783080"/>
+            <a:ext cx="6522415" cy="4663440"/>
           </a:xfrm>
           <a:prstGeom prst="rect">
             <a:avLst/>
@@ -13243,7 +13243,7 @@
               <a:buNone/>
             </a:pPr>
             <a:r>
-              <a:rPr lang="en-US" sz="4000" b="1" dirty="0">
+              <a:rPr lang="en-US" sz="3200" b="1" dirty="0">
                 <a:solidFill>
                   <a:srgbClr val="111111"/>
                 </a:solidFill>
@@ -13253,7 +13253,7 @@
               </a:rPr>
               <a:t>Topic: Managing Resources for Development through Economic Activities</a:t>
             </a:r>
-            <a:endParaRPr lang="en-US" sz="4000" dirty="0"/>
+            <a:endParaRPr lang="en-US" sz="3200" dirty="0"/>
           </a:p>
           <a:p>
             <a:pPr algn="l" indent="0" marL="0">
@@ -13263,7 +13263,7 @@
               <a:buNone/>
             </a:pPr>
             <a:r>
-              <a:rPr lang="en-US" sz="4000" b="1" dirty="0">
+              <a:rPr lang="en-US" sz="3200" b="1" dirty="0">
                 <a:solidFill>
                   <a:srgbClr val="111111"/>
                 </a:solidFill>
@@ -13273,7 +13273,7 @@
               </a:rPr>
               <a:t>Sub-topic: Agriculture as an Economic Activity of the Primary Sector</a:t>
             </a:r>
-            <a:endParaRPr lang="en-US" sz="4000" dirty="0"/>
+            <a:endParaRPr lang="en-US" sz="3200" dirty="0"/>
           </a:p>
           <a:p>
             <a:pPr algn="l" indent="0" marL="0">
@@ -13283,7 +13283,7 @@
               <a:buNone/>
             </a:pPr>
             <a:r>
-              <a:rPr lang="en-US" sz="4000" b="1" dirty="0">
+              <a:rPr lang="en-US" sz="3200" b="1" dirty="0">
                 <a:solidFill>
                   <a:srgbClr val="990011"/>
                 </a:solidFill>
@@ -13293,7 +13293,7 @@
               </a:rPr>
               <a:t>Lesson 30: The Impact of Agriculture</a:t>
             </a:r>
-            <a:endParaRPr lang="en-US" sz="4000" dirty="0"/>
+            <a:endParaRPr lang="en-US" sz="3200" dirty="0"/>
           </a:p>
         </p:txBody>
       </p:sp>

--- a/lecons/F4/40_F4_M2_L30_The_Impact_of_Agriculture.pptx
+++ b/lecons/F4/40_F4_M2_L30_The_Impact_of_Agriculture.pptx
@@ -56,9 +56,11 @@
     <p:sldId id="304" r:id="rId50"/>
     <p:sldId id="305" r:id="rId51"/>
     <p:sldId id="306" r:id="rId52"/>
+    <p:sldId id="307" r:id="rId53"/>
+    <p:sldId id="308" r:id="rId54"/>
   </p:sldIdLst>
   <p:notesMasterIdLst>
-    <p:notesMasterId r:id="rId53"/>
+    <p:notesMasterId r:id="rId55"/>
   </p:notesMasterIdLst>
   <p:sldSz cx="12192000" cy="6858000"/>
   <p:notesSz cx="6858000" cy="12192000"/>
@@ -3192,7 +3194,7 @@
           <a:p>
             <a:r>
               <a:rPr lang="en-US" dirty="0"/>
-              <a:t>Let us copy Impact on the Environment. Agriculture affects the environment as follows. On this slide we have Short-term effects and Long-term effects. Write each point on a new line, with the key term first, and explain it in your own words when we revise. When you finish, we go to the next slide.</a:t>
+              <a:t>Let us copy Negative Effects. Agriculture has the following negative effects on the environment. On this slide we have Pollution and Deforestation. Write each point on a new line, with the key term first, and explain it in your own words when we revise. When you finish, we go to the next slide.</a:t>
             </a:r>
             <a:endParaRPr lang="en-US" dirty="0"/>
           </a:p>
@@ -3280,7 +3282,7 @@
           <a:p>
             <a:r>
               <a:rPr lang="en-US" dirty="0"/>
-              <a:t>We continue with Impact on the Environment. On this slide we have Positive effects. Write each point on a new line, with the key term first, and explain it in your own words when we revise.</a:t>
+              <a:t>We continue with Negative Effects. On this slide we have Soil erosion and desertification and Loss of biodiversity. Write each point on a new line, with the key term first, and explain it in your own words when we revise.</a:t>
             </a:r>
             <a:endParaRPr lang="en-US" dirty="0"/>
           </a:p>
@@ -3368,7 +3370,7 @@
           <a:p>
             <a:r>
               <a:rPr lang="en-US" dirty="0"/>
-              <a:t>Now draw this illustration in your notebook: impacts of agriculture. Give it a title and label it clearly.</a:t>
+              <a:t>Let us copy Positive Effects. Agriculture has the following positive effects on the environment. On this slide we have Terraces and Agroforestry. Write each point on a new line, with the key term first, and explain it in your own words when we revise. When you finish, we go to the next slide.</a:t>
             </a:r>
             <a:endParaRPr lang="en-US" dirty="0"/>
           </a:p>
@@ -3544,7 +3546,7 @@
           <a:p>
             <a:r>
               <a:rPr lang="en-US" dirty="0"/>
-              <a:t>Now let us check what you have understood. Question 1: Give two positive impacts of agriculture on the economy. Answer in your exercise book.</a:t>
+              <a:t>We continue with Positive Effects. On this slide we have Organic farming. Write each point on a new line, with the key term first, and explain it in your own words when we revise.</a:t>
             </a:r>
             <a:endParaRPr lang="en-US" dirty="0"/>
           </a:p>
@@ -3632,7 +3634,7 @@
           <a:p>
             <a:r>
               <a:rPr lang="en-US" dirty="0"/>
-              <a:t>The expected answer is: employment and exports. If you got it right, well done.</a:t>
+              <a:t>Now draw this illustration in your notebook: impacts of agriculture. Give it a title and label it clearly.</a:t>
             </a:r>
             <a:endParaRPr lang="en-US" dirty="0"/>
           </a:p>
@@ -3720,7 +3722,7 @@
           <a:p>
             <a:r>
               <a:rPr lang="en-US" dirty="0"/>
-              <a:t>Now let us check what you have understood. Question 2: Give two long-term negative effects on the environment. Answer in your exercise book.</a:t>
+              <a:t>Now let us check what you have understood. Question 1: Give two positive impacts of agriculture on the economy. Answer in your exercise book.</a:t>
             </a:r>
             <a:endParaRPr lang="en-US" dirty="0"/>
           </a:p>
@@ -3808,7 +3810,7 @@
           <a:p>
             <a:r>
               <a:rPr lang="en-US" dirty="0"/>
-              <a:t>The expected answer is: soil erosion and deforestation. If you got it right, well done.</a:t>
+              <a:t>The expected answer is: employment and exports. If you got it right, well done.</a:t>
             </a:r>
             <a:endParaRPr lang="en-US" dirty="0"/>
           </a:p>
@@ -3896,7 +3898,7 @@
           <a:p>
             <a:r>
               <a:rPr lang="en-US" dirty="0"/>
-              <a:t>For those who need more practice, fill in the blanks in your exercise book. The answers are: number 1, GDP; number 2, pollute; number 3, deforestation.</a:t>
+              <a:t>Now let us check what you have understood. Question 2: Give two long-term negative effects on the environment. Answer in your exercise book.</a:t>
             </a:r>
             <a:endParaRPr lang="en-US" dirty="0"/>
           </a:p>
@@ -3984,7 +3986,7 @@
           <a:p>
             <a:r>
               <a:rPr lang="en-US" dirty="0"/>
-              <a:t>For your homework: Write one positive and one negative impact of farming in your area. We shall correct it at the beginning of our next lesson.</a:t>
+              <a:t>The expected answer is: soil erosion and deforestation. If you got it right, well done.</a:t>
             </a:r>
             <a:endParaRPr lang="en-US" dirty="0"/>
           </a:p>
@@ -4072,7 +4074,7 @@
           <a:p>
             <a:r>
               <a:rPr lang="en-US" dirty="0"/>
-              <a:t>Our next lesson will be on Lesson 31: Sustainable Agriculture. Thank you for your attention, and see you next time.</a:t>
+              <a:t>For those who need more practice, fill in the blanks in your exercise book. The answers are: number 1, GDP; number 2, pollute; number 3, deforestation.</a:t>
             </a:r>
             <a:endParaRPr lang="en-US" dirty="0"/>
           </a:p>
@@ -4160,7 +4162,7 @@
           <a:p>
             <a:r>
               <a:rPr lang="en-US" dirty="0"/>
-              <a:t>Let us play the bilingual game. I say a word in English, and you give me the French word. Then we do the reverse.</a:t>
+              <a:t>For your homework: Write one positive and one negative impact of farming in your area. We shall correct it at the beginning of our next lesson.</a:t>
             </a:r>
             <a:endParaRPr lang="en-US" dirty="0"/>
           </a:p>
@@ -4248,7 +4250,7 @@
           <a:p>
             <a:r>
               <a:rPr lang="en-US" dirty="0"/>
-              <a:t>I record this information in the official logbook of the class after the lesson.</a:t>
+              <a:t>Our next lesson will be on Lesson 31: Sustainable Agriculture. Thank you for your attention, and see you next time.</a:t>
             </a:r>
             <a:endParaRPr lang="en-US" dirty="0"/>
           </a:p>
@@ -4336,7 +4338,7 @@
           <a:p>
             <a:r>
               <a:rPr lang="en-US" dirty="0"/>
-              <a:t>I complete the second page of the logbook: the matter taught, the evaluation, the homework and the attendance.</a:t>
+              <a:t>Let us play the bilingual game. I say a word in English, and you give me the French word. Then we do the reverse.</a:t>
             </a:r>
             <a:endParaRPr lang="en-US" dirty="0"/>
           </a:p>
@@ -4512,7 +4514,7 @@
           <a:p>
             <a:r>
               <a:rPr lang="en-US" dirty="0"/>
-              <a:t>This slide is for me, the teacher: it gives the timing of the lesson and what to do if the projector is not available.</a:t>
+              <a:t>I record this information in the official logbook of the class after the lesson.</a:t>
             </a:r>
             <a:endParaRPr lang="en-US" dirty="0"/>
           </a:p>
@@ -4600,7 +4602,7 @@
           <a:p>
             <a:r>
               <a:rPr lang="en-US" dirty="0"/>
-              <a:t>These are the references and picture credits used to prepare this lesson.</a:t>
+              <a:t>I complete the second page of the logbook: the matter taught, the evaluation, the homework and the attendance.</a:t>
             </a:r>
             <a:endParaRPr lang="en-US" dirty="0"/>
           </a:p>
@@ -4624,6 +4626,182 @@
             <a:fld id="{F7021451-1387-4CA6-816F-3879F97B5CBC}" type="slidenum">
               <a:rPr lang="en-US"/>
               <a:t>51</a:t>
+            </a:fld>
+            <a:endParaRPr lang="en-US"/>
+          </a:p>
+        </p:txBody>
+      </p:sp>
+    </p:spTree>
+    <p:extLst>
+      <p:ext uri="{BB962C8B-B14F-4D97-AF65-F5344CB8AC3E}">
+        <p14:creationId xmlns:p14="http://schemas.microsoft.com/office/powerpoint/2010/main" val="1024086991"/>
+      </p:ext>
+    </p:extLst>
+  </p:cSld>
+  <p:clrMapOvr>
+    <a:masterClrMapping/>
+  </p:clrMapOvr>
+</p:notes>
+</file>
+
+<file path=ppt/notesSlides/notesSlide52.xml><?xml version="1.0" encoding="utf-8"?>
+<p:notes xmlns:a="http://schemas.openxmlformats.org/drawingml/2006/main" xmlns:r="http://schemas.openxmlformats.org/officeDocument/2006/relationships" xmlns:p="http://schemas.openxmlformats.org/presentationml/2006/main">
+  <p:cSld>
+    <p:spTree>
+      <p:nvGrpSpPr>
+        <p:cNvPr id="1" name=""/>
+        <p:cNvGrpSpPr/>
+        <p:nvPr/>
+      </p:nvGrpSpPr>
+      <p:grpSpPr>
+        <a:xfrm>
+          <a:off x="0" y="0"/>
+          <a:ext cx="0" cy="0"/>
+          <a:chOff x="0" y="0"/>
+          <a:chExt cx="0" cy="0"/>
+        </a:xfrm>
+      </p:grpSpPr>
+      <p:sp>
+        <p:nvSpPr>
+          <p:cNvPr id="2" name="Slide Image Placeholder 1"/>
+          <p:cNvSpPr>
+            <a:spLocks noGrp="1" noRot="1" noChangeAspect="1"/>
+          </p:cNvSpPr>
+          <p:nvPr>
+            <p:ph type="sldImg"/>
+          </p:nvPr>
+        </p:nvSpPr>
+        <p:spPr/>
+      </p:sp>
+      <p:sp>
+        <p:nvSpPr>
+          <p:cNvPr id="3" name="Notes Placeholder 2"/>
+          <p:cNvSpPr>
+            <a:spLocks noGrp="1"/>
+          </p:cNvSpPr>
+          <p:nvPr>
+            <p:ph type="body" idx="1"/>
+          </p:nvPr>
+        </p:nvSpPr>
+        <p:spPr/>
+        <p:txBody>
+          <a:bodyPr/>
+          <a:lstStyle/>
+          <a:p>
+            <a:r>
+              <a:rPr lang="en-US" dirty="0"/>
+              <a:t>This slide is for me, the teacher: it gives the timing of the lesson and what to do if the projector is not available.</a:t>
+            </a:r>
+            <a:endParaRPr lang="en-US" dirty="0"/>
+          </a:p>
+        </p:txBody>
+      </p:sp>
+      <p:sp>
+        <p:nvSpPr>
+          <p:cNvPr id="4" name="Slide Number Placeholder 3"/>
+          <p:cNvSpPr>
+            <a:spLocks noGrp="1"/>
+          </p:cNvSpPr>
+          <p:nvPr>
+            <p:ph type="sldNum" sz="quarter" idx="10"/>
+          </p:nvPr>
+        </p:nvSpPr>
+        <p:spPr/>
+        <p:txBody>
+          <a:bodyPr/>
+          <a:lstStyle/>
+          <a:p>
+            <a:fld id="{F7021451-1387-4CA6-816F-3879F97B5CBC}" type="slidenum">
+              <a:rPr lang="en-US"/>
+              <a:t>52</a:t>
+            </a:fld>
+            <a:endParaRPr lang="en-US"/>
+          </a:p>
+        </p:txBody>
+      </p:sp>
+    </p:spTree>
+    <p:extLst>
+      <p:ext uri="{BB962C8B-B14F-4D97-AF65-F5344CB8AC3E}">
+        <p14:creationId xmlns:p14="http://schemas.microsoft.com/office/powerpoint/2010/main" val="1024086991"/>
+      </p:ext>
+    </p:extLst>
+  </p:cSld>
+  <p:clrMapOvr>
+    <a:masterClrMapping/>
+  </p:clrMapOvr>
+</p:notes>
+</file>
+
+<file path=ppt/notesSlides/notesSlide53.xml><?xml version="1.0" encoding="utf-8"?>
+<p:notes xmlns:a="http://schemas.openxmlformats.org/drawingml/2006/main" xmlns:r="http://schemas.openxmlformats.org/officeDocument/2006/relationships" xmlns:p="http://schemas.openxmlformats.org/presentationml/2006/main">
+  <p:cSld>
+    <p:spTree>
+      <p:nvGrpSpPr>
+        <p:cNvPr id="1" name=""/>
+        <p:cNvGrpSpPr/>
+        <p:nvPr/>
+      </p:nvGrpSpPr>
+      <p:grpSpPr>
+        <a:xfrm>
+          <a:off x="0" y="0"/>
+          <a:ext cx="0" cy="0"/>
+          <a:chOff x="0" y="0"/>
+          <a:chExt cx="0" cy="0"/>
+        </a:xfrm>
+      </p:grpSpPr>
+      <p:sp>
+        <p:nvSpPr>
+          <p:cNvPr id="2" name="Slide Image Placeholder 1"/>
+          <p:cNvSpPr>
+            <a:spLocks noGrp="1" noRot="1" noChangeAspect="1"/>
+          </p:cNvSpPr>
+          <p:nvPr>
+            <p:ph type="sldImg"/>
+          </p:nvPr>
+        </p:nvSpPr>
+        <p:spPr/>
+      </p:sp>
+      <p:sp>
+        <p:nvSpPr>
+          <p:cNvPr id="3" name="Notes Placeholder 2"/>
+          <p:cNvSpPr>
+            <a:spLocks noGrp="1"/>
+          </p:cNvSpPr>
+          <p:nvPr>
+            <p:ph type="body" idx="1"/>
+          </p:nvPr>
+        </p:nvSpPr>
+        <p:spPr/>
+        <p:txBody>
+          <a:bodyPr/>
+          <a:lstStyle/>
+          <a:p>
+            <a:r>
+              <a:rPr lang="en-US" dirty="0"/>
+              <a:t>These are the references and picture credits used to prepare this lesson.</a:t>
+            </a:r>
+            <a:endParaRPr lang="en-US" dirty="0"/>
+          </a:p>
+        </p:txBody>
+      </p:sp>
+      <p:sp>
+        <p:nvSpPr>
+          <p:cNvPr id="4" name="Slide Number Placeholder 3"/>
+          <p:cNvSpPr>
+            <a:spLocks noGrp="1"/>
+          </p:cNvSpPr>
+          <p:nvPr>
+            <p:ph type="sldNum" sz="quarter" idx="10"/>
+          </p:nvPr>
+        </p:nvSpPr>
+        <p:spPr/>
+        <p:txBody>
+          <a:bodyPr/>
+          <a:lstStyle/>
+          <a:p>
+            <a:fld id="{F7021451-1387-4CA6-816F-3879F97B5CBC}" type="slidenum">
+              <a:rPr lang="en-US"/>
+              <a:t>53</a:t>
             </a:fld>
             <a:endParaRPr lang="en-US"/>
           </a:p>
@@ -14011,8 +14189,47 @@
         </p:nvSpPr>
         <p:spPr>
           <a:xfrm>
-            <a:off x="2697480" y="1783080"/>
-            <a:ext cx="9174175" cy="4663440"/>
+            <a:off x="2697480" y="1737360"/>
+            <a:ext cx="9174175" cy="457200"/>
+          </a:xfrm>
+          <a:prstGeom prst="rect">
+            <a:avLst/>
+          </a:prstGeom>
+          <a:noFill/>
+          <a:ln/>
+        </p:spPr>
+        <p:txBody>
+          <a:bodyPr wrap="square" lIns="0" tIns="0" rIns="0" bIns="0" rtlCol="0" anchor="ctr"/>
+          <a:lstStyle/>
+          <a:p>
+            <a:pPr algn="l" indent="0" marL="0">
+              <a:buNone/>
+            </a:pPr>
+            <a:r>
+              <a:rPr lang="en-US" sz="3200" b="1" dirty="0">
+                <a:solidFill>
+                  <a:srgbClr val="990011"/>
+                </a:solidFill>
+                <a:latin typeface="Times New Roman" pitchFamily="34" charset="0"/>
+                <a:ea typeface="Times New Roman" pitchFamily="34" charset="-122"/>
+                <a:cs typeface="Times New Roman" pitchFamily="34" charset="-120"/>
+              </a:rPr>
+              <a:t>A) Negative Effects</a:t>
+            </a:r>
+            <a:endParaRPr lang="en-US" sz="3200" dirty="0"/>
+          </a:p>
+        </p:txBody>
+      </p:sp>
+      <p:sp>
+        <p:nvSpPr>
+          <p:cNvPr id="6" name="Text 3"/>
+          <p:cNvSpPr/>
+          <p:nvPr/>
+        </p:nvSpPr>
+        <p:spPr>
+          <a:xfrm>
+            <a:off x="2697480" y="2240280"/>
+            <a:ext cx="9174175" cy="4206240"/>
           </a:xfrm>
           <a:prstGeom prst="rect">
             <a:avLst/>
@@ -14039,7 +14256,7 @@
                 <a:ea typeface="Times New Roman" pitchFamily="34" charset="-122"/>
                 <a:cs typeface="Times New Roman" pitchFamily="34" charset="-120"/>
               </a:rPr>
-              <a:t>Agriculture affects the environment as follows:</a:t>
+              <a:t>Agriculture has the following negative effects on the environment:</a:t>
             </a:r>
             <a:endParaRPr lang="en-US" sz="4000" dirty="0"/>
           </a:p>
@@ -14059,7 +14276,7 @@
                 <a:ea typeface="Times New Roman" pitchFamily="34" charset="-122"/>
                 <a:cs typeface="Times New Roman" pitchFamily="34" charset="-120"/>
               </a:rPr>
-              <a:t>Short-term effects: </a:t>
+              <a:t>Pollution: </a:t>
             </a:r>
             <a:pPr algn="l" indent="0" marL="0">
               <a:spcAft>
@@ -14076,7 +14293,7 @@
                 <a:ea typeface="Times New Roman" pitchFamily="34" charset="-122"/>
                 <a:cs typeface="Times New Roman" pitchFamily="34" charset="-120"/>
               </a:rPr>
-              <a:t>Chemicals pollute water and bush fires pollute the air.</a:t>
+              <a:t>Chemicals pollute water, and bush fires pollute the air.</a:t>
             </a:r>
             <a:endParaRPr lang="en-US" sz="4000" dirty="0"/>
           </a:p>
@@ -14096,7 +14313,7 @@
                 <a:ea typeface="Times New Roman" pitchFamily="34" charset="-122"/>
                 <a:cs typeface="Times New Roman" pitchFamily="34" charset="-120"/>
               </a:rPr>
-              <a:t>Long-term effects: </a:t>
+              <a:t>Deforestation: </a:t>
             </a:r>
             <a:pPr algn="l" indent="0" marL="0">
               <a:spcAft>
@@ -14113,7 +14330,7 @@
                 <a:ea typeface="Times New Roman" pitchFamily="34" charset="-122"/>
                 <a:cs typeface="Times New Roman" pitchFamily="34" charset="-120"/>
               </a:rPr>
-              <a:t>Deforestation, soil erosion, desertification and loss of biodiversity occur.</a:t>
+              <a:t>Forests are cleared for farms.</a:t>
             </a:r>
             <a:endParaRPr lang="en-US" sz="4000" dirty="0"/>
           </a:p>
@@ -14290,7 +14507,7 @@
                 <a:ea typeface="Times New Roman" pitchFamily="34" charset="-122"/>
                 <a:cs typeface="Times New Roman" pitchFamily="34" charset="-120"/>
               </a:rPr>
-              <a:t>2. Impact on the Environment (continued)</a:t>
+              <a:t>2. Impact on the Environment</a:t>
             </a:r>
             <a:endParaRPr lang="en-US" sz="3600" dirty="0"/>
           </a:p>
@@ -14304,8 +14521,47 @@
         </p:nvSpPr>
         <p:spPr>
           <a:xfrm>
-            <a:off x="5349240" y="1783080"/>
-            <a:ext cx="6522415" cy="4663440"/>
+            <a:off x="5349240" y="1737360"/>
+            <a:ext cx="6522415" cy="457200"/>
+          </a:xfrm>
+          <a:prstGeom prst="rect">
+            <a:avLst/>
+          </a:prstGeom>
+          <a:noFill/>
+          <a:ln/>
+        </p:spPr>
+        <p:txBody>
+          <a:bodyPr wrap="square" lIns="0" tIns="0" rIns="0" bIns="0" rtlCol="0" anchor="ctr"/>
+          <a:lstStyle/>
+          <a:p>
+            <a:pPr algn="l" indent="0" marL="0">
+              <a:buNone/>
+            </a:pPr>
+            <a:r>
+              <a:rPr lang="en-US" sz="3200" b="1" dirty="0">
+                <a:solidFill>
+                  <a:srgbClr val="990011"/>
+                </a:solidFill>
+                <a:latin typeface="Times New Roman" pitchFamily="34" charset="0"/>
+                <a:ea typeface="Times New Roman" pitchFamily="34" charset="-122"/>
+                <a:cs typeface="Times New Roman" pitchFamily="34" charset="-120"/>
+              </a:rPr>
+              <a:t>A) Negative Effects (continued)</a:t>
+            </a:r>
+            <a:endParaRPr lang="en-US" sz="3200" dirty="0"/>
+          </a:p>
+        </p:txBody>
+      </p:sp>
+      <p:sp>
+        <p:nvSpPr>
+          <p:cNvPr id="6" name="Text 3"/>
+          <p:cNvSpPr/>
+          <p:nvPr/>
+        </p:nvSpPr>
+        <p:spPr>
+          <a:xfrm>
+            <a:off x="5349240" y="2240280"/>
+            <a:ext cx="6522415" cy="4206240"/>
           </a:xfrm>
           <a:prstGeom prst="rect">
             <a:avLst/>
@@ -14332,7 +14588,7 @@
                 <a:ea typeface="Times New Roman" pitchFamily="34" charset="-122"/>
                 <a:cs typeface="Times New Roman" pitchFamily="34" charset="-120"/>
               </a:rPr>
-              <a:t>Positive effects: </a:t>
+              <a:t>Soil erosion and desertification: </a:t>
             </a:r>
             <a:pPr algn="l" indent="0" marL="0">
               <a:spcAft>
@@ -14349,7 +14605,44 @@
                 <a:ea typeface="Times New Roman" pitchFamily="34" charset="-122"/>
                 <a:cs typeface="Times New Roman" pitchFamily="34" charset="-120"/>
               </a:rPr>
-              <a:t>Terraces, agroforestry and organic farming protect the land.</a:t>
+              <a:t>Bare soils are washed or blown away.</a:t>
+            </a:r>
+            <a:endParaRPr lang="en-US" sz="4000" dirty="0"/>
+          </a:p>
+          <a:p>
+            <a:pPr algn="l" indent="0" marL="0">
+              <a:spcAft>
+                <a:spcPts val="800"/>
+              </a:spcAft>
+              <a:buNone/>
+            </a:pPr>
+            <a:r>
+              <a:rPr lang="en-US" sz="4000" b="1" dirty="0">
+                <a:solidFill>
+                  <a:srgbClr val="111111"/>
+                </a:solidFill>
+                <a:latin typeface="Times New Roman" pitchFamily="34" charset="0"/>
+                <a:ea typeface="Times New Roman" pitchFamily="34" charset="-122"/>
+                <a:cs typeface="Times New Roman" pitchFamily="34" charset="-120"/>
+              </a:rPr>
+              <a:t>Loss of biodiversity: </a:t>
+            </a:r>
+            <a:pPr algn="l" indent="0" marL="0">
+              <a:spcAft>
+                <a:spcPts val="800"/>
+              </a:spcAft>
+              <a:buNone/>
+            </a:pPr>
+            <a:r>
+              <a:rPr lang="en-US" sz="4000" dirty="0">
+                <a:solidFill>
+                  <a:srgbClr val="111111"/>
+                </a:solidFill>
+                <a:latin typeface="Times New Roman" pitchFamily="34" charset="0"/>
+                <a:ea typeface="Times New Roman" pitchFamily="34" charset="-122"/>
+                <a:cs typeface="Times New Roman" pitchFamily="34" charset="-120"/>
+              </a:rPr>
+              <a:t>Plants and animals lose their habitats.</a:t>
             </a:r>
             <a:endParaRPr lang="en-US" sz="4000" dirty="0"/>
           </a:p>
@@ -14467,48 +14760,9 @@
           </a:p>
         </p:txBody>
       </p:sp>
-      <p:sp>
-        <p:nvSpPr>
-          <p:cNvPr id="3" name="Text 1"/>
-          <p:cNvSpPr/>
-          <p:nvPr/>
-        </p:nvSpPr>
-        <p:spPr>
-          <a:xfrm>
-            <a:off x="457200" y="1005840"/>
-            <a:ext cx="11277295" cy="731520"/>
-          </a:xfrm>
-          <a:prstGeom prst="rect">
-            <a:avLst/>
-          </a:prstGeom>
-          <a:noFill/>
-          <a:ln/>
-        </p:spPr>
-        <p:txBody>
-          <a:bodyPr wrap="square" lIns="0" tIns="0" rIns="0" bIns="0" rtlCol="0" anchor="ctr"/>
-          <a:lstStyle/>
-          <a:p>
-            <a:pPr algn="ctr" indent="0" marL="0">
-              <a:buNone/>
-            </a:pPr>
-            <a:r>
-              <a:rPr lang="en-US" sz="3600" b="1" dirty="0">
-                <a:solidFill>
-                  <a:srgbClr val="990011"/>
-                </a:solidFill>
-                <a:latin typeface="Times New Roman" pitchFamily="34" charset="0"/>
-                <a:ea typeface="Times New Roman" pitchFamily="34" charset="-122"/>
-                <a:cs typeface="Times New Roman" pitchFamily="34" charset="-120"/>
-              </a:rPr>
-              <a:t>2. Impact on the Environment</a:t>
-            </a:r>
-            <a:endParaRPr lang="en-US" sz="3600" dirty="0"/>
-          </a:p>
-        </p:txBody>
-      </p:sp>
       <p:pic>
         <p:nvPicPr>
-          <p:cNvPr id="4" name="Image 0" descr="/home/claude/f4/img/v2/agri_impacts_big.png">    </p:cNvPr>
+          <p:cNvPr id="3" name="Image 0" descr="/home/claude/f4/img/minesec_sheet.png">    </p:cNvPr>
           <p:cNvPicPr>
             <a:picLocks noChangeAspect="1"/>
           </p:cNvPicPr>
@@ -14522,8 +14776,8 @@
         </p:blipFill>
         <p:spPr>
           <a:xfrm>
-            <a:off x="629930" y="1783080"/>
-            <a:ext cx="10931835" cy="4270248"/>
+            <a:off x="0" y="658368"/>
+            <a:ext cx="2468880" cy="5833872"/>
           </a:xfrm>
           <a:prstGeom prst="rect">
             <a:avLst/>
@@ -14532,14 +14786,14 @@
       </p:pic>
       <p:sp>
         <p:nvSpPr>
-          <p:cNvPr id="5" name="Text 2"/>
+          <p:cNvPr id="4" name="Text 1"/>
           <p:cNvSpPr/>
           <p:nvPr/>
         </p:nvSpPr>
         <p:spPr>
           <a:xfrm>
-            <a:off x="457200" y="6089904"/>
-            <a:ext cx="11277295" cy="347472"/>
+            <a:off x="2697480" y="1005840"/>
+            <a:ext cx="9174175" cy="731520"/>
           </a:xfrm>
           <a:prstGeom prst="rect">
             <a:avLst/>
@@ -14548,24 +14802,181 @@
           <a:ln/>
         </p:spPr>
         <p:txBody>
-          <a:bodyPr wrap="square" lIns="0" tIns="0" rIns="0" bIns="0" rtlCol="0" anchor="ctr"/>
+          <a:bodyPr wrap="square" lIns="0" tIns="0" rIns="0" bIns="0" rtlCol="0" anchor="ctr">
+            <a:normAutofit/>
+          </a:bodyPr>
           <a:lstStyle/>
           <a:p>
             <a:pPr algn="ctr" indent="0" marL="0">
               <a:buNone/>
             </a:pPr>
             <a:r>
-              <a:rPr lang="en-US" sz="1800" i="1" dirty="0">
-                <a:solidFill>
-                  <a:srgbClr val="555555"/>
+              <a:rPr lang="en-US" sz="3600" b="1" dirty="0">
+                <a:solidFill>
+                  <a:srgbClr val="990011"/>
                 </a:solidFill>
                 <a:latin typeface="Times New Roman" pitchFamily="34" charset="0"/>
                 <a:ea typeface="Times New Roman" pitchFamily="34" charset="-122"/>
                 <a:cs typeface="Times New Roman" pitchFamily="34" charset="-120"/>
               </a:rPr>
-              <a:t>Illustration: impacts of agriculture</a:t>
-            </a:r>
-            <a:endParaRPr lang="en-US" sz="1800" dirty="0"/>
+              <a:t>2. Impact on the Environment</a:t>
+            </a:r>
+            <a:endParaRPr lang="en-US" sz="3600" dirty="0"/>
+          </a:p>
+        </p:txBody>
+      </p:sp>
+      <p:sp>
+        <p:nvSpPr>
+          <p:cNvPr id="5" name="Text 2"/>
+          <p:cNvSpPr/>
+          <p:nvPr/>
+        </p:nvSpPr>
+        <p:spPr>
+          <a:xfrm>
+            <a:off x="2697480" y="1737360"/>
+            <a:ext cx="9174175" cy="457200"/>
+          </a:xfrm>
+          <a:prstGeom prst="rect">
+            <a:avLst/>
+          </a:prstGeom>
+          <a:noFill/>
+          <a:ln/>
+        </p:spPr>
+        <p:txBody>
+          <a:bodyPr wrap="square" lIns="0" tIns="0" rIns="0" bIns="0" rtlCol="0" anchor="ctr"/>
+          <a:lstStyle/>
+          <a:p>
+            <a:pPr algn="l" indent="0" marL="0">
+              <a:buNone/>
+            </a:pPr>
+            <a:r>
+              <a:rPr lang="en-US" sz="3200" b="1" dirty="0">
+                <a:solidFill>
+                  <a:srgbClr val="990011"/>
+                </a:solidFill>
+                <a:latin typeface="Times New Roman" pitchFamily="34" charset="0"/>
+                <a:ea typeface="Times New Roman" pitchFamily="34" charset="-122"/>
+                <a:cs typeface="Times New Roman" pitchFamily="34" charset="-120"/>
+              </a:rPr>
+              <a:t>B) Positive Effects</a:t>
+            </a:r>
+            <a:endParaRPr lang="en-US" sz="3200" dirty="0"/>
+          </a:p>
+        </p:txBody>
+      </p:sp>
+      <p:sp>
+        <p:nvSpPr>
+          <p:cNvPr id="6" name="Text 3"/>
+          <p:cNvSpPr/>
+          <p:nvPr/>
+        </p:nvSpPr>
+        <p:spPr>
+          <a:xfrm>
+            <a:off x="2697480" y="2240280"/>
+            <a:ext cx="9174175" cy="4206240"/>
+          </a:xfrm>
+          <a:prstGeom prst="rect">
+            <a:avLst/>
+          </a:prstGeom>
+          <a:noFill/>
+          <a:ln/>
+        </p:spPr>
+        <p:txBody>
+          <a:bodyPr wrap="square" lIns="0" tIns="0" rIns="0" bIns="0" rtlCol="0" anchor="t"/>
+          <a:lstStyle/>
+          <a:p>
+            <a:pPr algn="l" indent="0" marL="0">
+              <a:spcAft>
+                <a:spcPts val="800"/>
+              </a:spcAft>
+              <a:buNone/>
+            </a:pPr>
+            <a:r>
+              <a:rPr lang="en-US" sz="4000" i="1" dirty="0">
+                <a:solidFill>
+                  <a:srgbClr val="111111"/>
+                </a:solidFill>
+                <a:latin typeface="Times New Roman" pitchFamily="34" charset="0"/>
+                <a:ea typeface="Times New Roman" pitchFamily="34" charset="-122"/>
+                <a:cs typeface="Times New Roman" pitchFamily="34" charset="-120"/>
+              </a:rPr>
+              <a:t>Agriculture has the following positive effects on the environment:</a:t>
+            </a:r>
+            <a:endParaRPr lang="en-US" sz="4000" dirty="0"/>
+          </a:p>
+          <a:p>
+            <a:pPr algn="l" indent="0" marL="0">
+              <a:spcAft>
+                <a:spcPts val="800"/>
+              </a:spcAft>
+              <a:buNone/>
+            </a:pPr>
+            <a:r>
+              <a:rPr lang="en-US" sz="4000" b="1" dirty="0">
+                <a:solidFill>
+                  <a:srgbClr val="111111"/>
+                </a:solidFill>
+                <a:latin typeface="Times New Roman" pitchFamily="34" charset="0"/>
+                <a:ea typeface="Times New Roman" pitchFamily="34" charset="-122"/>
+                <a:cs typeface="Times New Roman" pitchFamily="34" charset="-120"/>
+              </a:rPr>
+              <a:t>Terraces: </a:t>
+            </a:r>
+            <a:pPr algn="l" indent="0" marL="0">
+              <a:spcAft>
+                <a:spcPts val="800"/>
+              </a:spcAft>
+              <a:buNone/>
+            </a:pPr>
+            <a:r>
+              <a:rPr lang="en-US" sz="4000" dirty="0">
+                <a:solidFill>
+                  <a:srgbClr val="111111"/>
+                </a:solidFill>
+                <a:latin typeface="Times New Roman" pitchFamily="34" charset="0"/>
+                <a:ea typeface="Times New Roman" pitchFamily="34" charset="-122"/>
+                <a:cs typeface="Times New Roman" pitchFamily="34" charset="-120"/>
+              </a:rPr>
+              <a:t>They stop soil erosion on slopes.</a:t>
+            </a:r>
+            <a:endParaRPr lang="en-US" sz="4000" dirty="0"/>
+          </a:p>
+          <a:p>
+            <a:pPr algn="l" indent="0" marL="0">
+              <a:spcAft>
+                <a:spcPts val="800"/>
+              </a:spcAft>
+              <a:buNone/>
+            </a:pPr>
+            <a:r>
+              <a:rPr lang="en-US" sz="4000" b="1" dirty="0">
+                <a:solidFill>
+                  <a:srgbClr val="111111"/>
+                </a:solidFill>
+                <a:latin typeface="Times New Roman" pitchFamily="34" charset="0"/>
+                <a:ea typeface="Times New Roman" pitchFamily="34" charset="-122"/>
+                <a:cs typeface="Times New Roman" pitchFamily="34" charset="-120"/>
+              </a:rPr>
+              <a:t>Agroforestry: </a:t>
+            </a:r>
+            <a:pPr algn="l" indent="0" marL="0">
+              <a:spcAft>
+                <a:spcPts val="800"/>
+              </a:spcAft>
+              <a:buNone/>
+            </a:pPr>
+            <a:r>
+              <a:rPr lang="en-US" sz="4000" dirty="0">
+                <a:solidFill>
+                  <a:srgbClr val="111111"/>
+                </a:solidFill>
+                <a:latin typeface="Times New Roman" pitchFamily="34" charset="0"/>
+                <a:ea typeface="Times New Roman" pitchFamily="34" charset="-122"/>
+                <a:cs typeface="Times New Roman" pitchFamily="34" charset="-120"/>
+              </a:rPr>
+              <a:t>Trees planted with crops protect the soil.</a:t>
+            </a:r>
+            <a:endParaRPr lang="en-US" sz="4000" dirty="0"/>
           </a:p>
         </p:txBody>
       </p:sp>
@@ -14914,7 +15325,7 @@
                 <a:ea typeface="Calibri" pitchFamily="34" charset="-122"/>
                 <a:cs typeface="Calibri" pitchFamily="34" charset="-120"/>
               </a:rPr>
-              <a:t>FORMATIVE EVALUATION</a:t>
+              <a:t>BOARD SUMMARY</a:t>
             </a:r>
             <a:endParaRPr lang="en-US" sz="1400" dirty="0"/>
           </a:p>
@@ -14979,7 +15390,7 @@
                 <a:ea typeface="Times New Roman" pitchFamily="34" charset="-122"/>
                 <a:cs typeface="Times New Roman" pitchFamily="34" charset="-120"/>
               </a:rPr>
-              <a:t>Evaluation 1</a:t>
+              <a:t>2. Impact on the Environment</a:t>
             </a:r>
             <a:endParaRPr lang="en-US" sz="3600" dirty="0"/>
           </a:p>
@@ -14993,8 +15404,47 @@
         </p:nvSpPr>
         <p:spPr>
           <a:xfrm>
-            <a:off x="5349240" y="1783080"/>
-            <a:ext cx="6522415" cy="4663440"/>
+            <a:off x="5349240" y="1737360"/>
+            <a:ext cx="6522415" cy="457200"/>
+          </a:xfrm>
+          <a:prstGeom prst="rect">
+            <a:avLst/>
+          </a:prstGeom>
+          <a:noFill/>
+          <a:ln/>
+        </p:spPr>
+        <p:txBody>
+          <a:bodyPr wrap="square" lIns="0" tIns="0" rIns="0" bIns="0" rtlCol="0" anchor="ctr"/>
+          <a:lstStyle/>
+          <a:p>
+            <a:pPr algn="l" indent="0" marL="0">
+              <a:buNone/>
+            </a:pPr>
+            <a:r>
+              <a:rPr lang="en-US" sz="3200" b="1" dirty="0">
+                <a:solidFill>
+                  <a:srgbClr val="990011"/>
+                </a:solidFill>
+                <a:latin typeface="Times New Roman" pitchFamily="34" charset="0"/>
+                <a:ea typeface="Times New Roman" pitchFamily="34" charset="-122"/>
+                <a:cs typeface="Times New Roman" pitchFamily="34" charset="-120"/>
+              </a:rPr>
+              <a:t>B) Positive Effects (continued)</a:t>
+            </a:r>
+            <a:endParaRPr lang="en-US" sz="3200" dirty="0"/>
+          </a:p>
+        </p:txBody>
+      </p:sp>
+      <p:sp>
+        <p:nvSpPr>
+          <p:cNvPr id="6" name="Text 3"/>
+          <p:cNvSpPr/>
+          <p:nvPr/>
+        </p:nvSpPr>
+        <p:spPr>
+          <a:xfrm>
+            <a:off x="5349240" y="2240280"/>
+            <a:ext cx="6522415" cy="4206240"/>
           </a:xfrm>
           <a:prstGeom prst="rect">
             <a:avLst/>
@@ -15013,7 +15463,7 @@
               <a:buNone/>
             </a:pPr>
             <a:r>
-              <a:rPr lang="en-US" sz="4000" dirty="0">
+              <a:rPr lang="en-US" sz="4000" b="1" dirty="0">
                 <a:solidFill>
                   <a:srgbClr val="111111"/>
                 </a:solidFill>
@@ -15021,7 +15471,24 @@
                 <a:ea typeface="Times New Roman" pitchFamily="34" charset="-122"/>
                 <a:cs typeface="Times New Roman" pitchFamily="34" charset="-120"/>
               </a:rPr>
-              <a:t>Give two positive impacts of agriculture on the economy.</a:t>
+              <a:t>Organic farming: </a:t>
+            </a:r>
+            <a:pPr algn="l" indent="0" marL="0">
+              <a:spcAft>
+                <a:spcPts val="800"/>
+              </a:spcAft>
+              <a:buNone/>
+            </a:pPr>
+            <a:r>
+              <a:rPr lang="en-US" sz="4000" dirty="0">
+                <a:solidFill>
+                  <a:srgbClr val="111111"/>
+                </a:solidFill>
+                <a:latin typeface="Times New Roman" pitchFamily="34" charset="0"/>
+                <a:ea typeface="Times New Roman" pitchFamily="34" charset="-122"/>
+                <a:cs typeface="Times New Roman" pitchFamily="34" charset="-120"/>
+              </a:rPr>
+              <a:t>Manure keeps the soil fertile without chemicals.</a:t>
             </a:r>
             <a:endParaRPr lang="en-US" sz="4000" dirty="0"/>
           </a:p>
@@ -15133,15 +15600,54 @@
                 <a:ea typeface="Calibri" pitchFamily="34" charset="-122"/>
                 <a:cs typeface="Calibri" pitchFamily="34" charset="-120"/>
               </a:rPr>
-              <a:t>FORMATIVE EVALUATION</a:t>
+              <a:t>BOARD SUMMARY</a:t>
             </a:r>
             <a:endParaRPr lang="en-US" sz="1400" dirty="0"/>
+          </a:p>
+        </p:txBody>
+      </p:sp>
+      <p:sp>
+        <p:nvSpPr>
+          <p:cNvPr id="3" name="Text 1"/>
+          <p:cNvSpPr/>
+          <p:nvPr/>
+        </p:nvSpPr>
+        <p:spPr>
+          <a:xfrm>
+            <a:off x="457200" y="1005840"/>
+            <a:ext cx="11277295" cy="731520"/>
+          </a:xfrm>
+          <a:prstGeom prst="rect">
+            <a:avLst/>
+          </a:prstGeom>
+          <a:noFill/>
+          <a:ln/>
+        </p:spPr>
+        <p:txBody>
+          <a:bodyPr wrap="square" lIns="0" tIns="0" rIns="0" bIns="0" rtlCol="0" anchor="ctr"/>
+          <a:lstStyle/>
+          <a:p>
+            <a:pPr algn="ctr" indent="0" marL="0">
+              <a:buNone/>
+            </a:pPr>
+            <a:r>
+              <a:rPr lang="en-US" sz="3600" b="1" dirty="0">
+                <a:solidFill>
+                  <a:srgbClr val="990011"/>
+                </a:solidFill>
+                <a:latin typeface="Times New Roman" pitchFamily="34" charset="0"/>
+                <a:ea typeface="Times New Roman" pitchFamily="34" charset="-122"/>
+                <a:cs typeface="Times New Roman" pitchFamily="34" charset="-120"/>
+              </a:rPr>
+              <a:t>2. Impact on the Environment</a:t>
+            </a:r>
+            <a:endParaRPr lang="en-US" sz="3600" dirty="0"/>
           </a:p>
         </p:txBody>
       </p:sp>
       <p:pic>
         <p:nvPicPr>
-          <p:cNvPr id="3" name="Image 0" descr="/home/claude/f4/img/minesec_sheet.png">    </p:cNvPr>
+          <p:cNvPr id="4" name="Image 0" descr="/home/claude/f4/img/v2/agri_impacts_big.png">    </p:cNvPr>
           <p:cNvPicPr>
             <a:picLocks noChangeAspect="1"/>
           </p:cNvPicPr>
@@ -15155,8 +15661,8 @@
         </p:blipFill>
         <p:spPr>
           <a:xfrm>
-            <a:off x="0" y="658368"/>
-            <a:ext cx="5120640" cy="5833872"/>
+            <a:off x="629930" y="1783080"/>
+            <a:ext cx="10931835" cy="4270248"/>
           </a:xfrm>
           <a:prstGeom prst="rect">
             <a:avLst/>
@@ -15165,14 +15671,14 @@
       </p:pic>
       <p:sp>
         <p:nvSpPr>
-          <p:cNvPr id="4" name="Text 1"/>
+          <p:cNvPr id="5" name="Text 2"/>
           <p:cNvSpPr/>
           <p:nvPr/>
         </p:nvSpPr>
         <p:spPr>
           <a:xfrm>
-            <a:off x="5349240" y="1005840"/>
-            <a:ext cx="6522415" cy="731520"/>
+            <a:off x="457200" y="6089904"/>
+            <a:ext cx="11277295" cy="347472"/>
           </a:xfrm>
           <a:prstGeom prst="rect">
             <a:avLst/>
@@ -15181,68 +15687,24 @@
           <a:ln/>
         </p:spPr>
         <p:txBody>
-          <a:bodyPr wrap="square" lIns="0" tIns="0" rIns="0" bIns="0" rtlCol="0" anchor="ctr">
-            <a:normAutofit/>
-          </a:bodyPr>
+          <a:bodyPr wrap="square" lIns="0" tIns="0" rIns="0" bIns="0" rtlCol="0" anchor="ctr"/>
           <a:lstStyle/>
           <a:p>
             <a:pPr algn="ctr" indent="0" marL="0">
               <a:buNone/>
             </a:pPr>
             <a:r>
-              <a:rPr lang="en-US" sz="3600" b="1" dirty="0">
-                <a:solidFill>
-                  <a:srgbClr val="990011"/>
+              <a:rPr lang="en-US" sz="1800" i="1" dirty="0">
+                <a:solidFill>
+                  <a:srgbClr val="555555"/>
                 </a:solidFill>
                 <a:latin typeface="Times New Roman" pitchFamily="34" charset="0"/>
                 <a:ea typeface="Times New Roman" pitchFamily="34" charset="-122"/>
                 <a:cs typeface="Times New Roman" pitchFamily="34" charset="-120"/>
               </a:rPr>
-              <a:t>Expected Answer</a:t>
-            </a:r>
-            <a:endParaRPr lang="en-US" sz="3600" dirty="0"/>
-          </a:p>
-        </p:txBody>
-      </p:sp>
-      <p:sp>
-        <p:nvSpPr>
-          <p:cNvPr id="5" name="Text 2"/>
-          <p:cNvSpPr/>
-          <p:nvPr/>
-        </p:nvSpPr>
-        <p:spPr>
-          <a:xfrm>
-            <a:off x="5349240" y="1783080"/>
-            <a:ext cx="6522415" cy="4663440"/>
-          </a:xfrm>
-          <a:prstGeom prst="rect">
-            <a:avLst/>
-          </a:prstGeom>
-          <a:noFill/>
-          <a:ln/>
-        </p:spPr>
-        <p:txBody>
-          <a:bodyPr wrap="square" lIns="0" tIns="0" rIns="0" bIns="0" rtlCol="0" anchor="t"/>
-          <a:lstStyle/>
-          <a:p>
-            <a:pPr algn="l" indent="0" marL="0">
-              <a:spcAft>
-                <a:spcPts val="800"/>
-              </a:spcAft>
-              <a:buNone/>
-            </a:pPr>
-            <a:r>
-              <a:rPr lang="en-US" sz="4000" dirty="0">
-                <a:solidFill>
-                  <a:srgbClr val="111111"/>
-                </a:solidFill>
-                <a:latin typeface="Times New Roman" pitchFamily="34" charset="0"/>
-                <a:ea typeface="Times New Roman" pitchFamily="34" charset="-122"/>
-                <a:cs typeface="Times New Roman" pitchFamily="34" charset="-120"/>
-              </a:rPr>
-              <a:t>Employment and exports.</a:t>
-            </a:r>
-            <a:endParaRPr lang="en-US" sz="4000" dirty="0"/>
+              <a:t>Illustration: impacts of agriculture</a:t>
+            </a:r>
+            <a:endParaRPr lang="en-US" sz="1800" dirty="0"/>
           </a:p>
         </p:txBody>
       </p:sp>
@@ -15417,7 +15879,7 @@
                 <a:ea typeface="Times New Roman" pitchFamily="34" charset="-122"/>
                 <a:cs typeface="Times New Roman" pitchFamily="34" charset="-120"/>
               </a:rPr>
-              <a:t>Evaluation 2</a:t>
+              <a:t>Evaluation 1</a:t>
             </a:r>
             <a:endParaRPr lang="en-US" sz="3600" dirty="0"/>
           </a:p>
@@ -15459,7 +15921,7 @@
                 <a:ea typeface="Times New Roman" pitchFamily="34" charset="-122"/>
                 <a:cs typeface="Times New Roman" pitchFamily="34" charset="-120"/>
               </a:rPr>
-              <a:t>Give two long-term negative effects on the environment.</a:t>
+              <a:t>Give two positive impacts of agriculture on the economy.</a:t>
             </a:r>
             <a:endParaRPr lang="en-US" sz="4000" dirty="0"/>
           </a:p>
@@ -15678,7 +16140,7 @@
                 <a:ea typeface="Times New Roman" pitchFamily="34" charset="-122"/>
                 <a:cs typeface="Times New Roman" pitchFamily="34" charset="-120"/>
               </a:rPr>
-              <a:t>Soil erosion and deforestation.</a:t>
+              <a:t>Employment and exports.</a:t>
             </a:r>
             <a:endParaRPr lang="en-US" sz="4000" dirty="0"/>
           </a:p>
@@ -15790,7 +16252,7 @@
                 <a:ea typeface="Calibri" pitchFamily="34" charset="-122"/>
                 <a:cs typeface="Calibri" pitchFamily="34" charset="-120"/>
               </a:rPr>
-              <a:t>REMEDIATION</a:t>
+              <a:t>FORMATIVE EVALUATION</a:t>
             </a:r>
             <a:endParaRPr lang="en-US" sz="1400" dirty="0"/>
           </a:p>
@@ -15813,7 +16275,7 @@
         <p:spPr>
           <a:xfrm>
             <a:off x="0" y="658368"/>
-            <a:ext cx="2468880" cy="5833872"/>
+            <a:ext cx="5120640" cy="5833872"/>
           </a:xfrm>
           <a:prstGeom prst="rect">
             <a:avLst/>
@@ -15828,8 +16290,8 @@
         </p:nvSpPr>
         <p:spPr>
           <a:xfrm>
-            <a:off x="2697480" y="1005840"/>
-            <a:ext cx="9174175" cy="731520"/>
+            <a:off x="5349240" y="1005840"/>
+            <a:ext cx="6522415" cy="731520"/>
           </a:xfrm>
           <a:prstGeom prst="rect">
             <a:avLst/>
@@ -15855,7 +16317,7 @@
                 <a:ea typeface="Times New Roman" pitchFamily="34" charset="-122"/>
                 <a:cs typeface="Times New Roman" pitchFamily="34" charset="-120"/>
               </a:rPr>
-              <a:t>Remediation</a:t>
+              <a:t>Evaluation 2</a:t>
             </a:r>
             <a:endParaRPr lang="en-US" sz="3600" dirty="0"/>
           </a:p>
@@ -15869,8 +16331,8 @@
         </p:nvSpPr>
         <p:spPr>
           <a:xfrm>
-            <a:off x="2697480" y="1783080"/>
-            <a:ext cx="9174175" cy="4663440"/>
+            <a:off x="5349240" y="1783080"/>
+            <a:ext cx="6522415" cy="4663440"/>
           </a:xfrm>
           <a:prstGeom prst="rect">
             <a:avLst/>
@@ -15889,7 +16351,7 @@
               <a:buNone/>
             </a:pPr>
             <a:r>
-              <a:rPr lang="en-US" sz="4000" b="1" dirty="0">
+              <a:rPr lang="en-US" sz="4000" dirty="0">
                 <a:solidFill>
                   <a:srgbClr val="111111"/>
                 </a:solidFill>
@@ -15897,73 +16359,7 @@
                 <a:ea typeface="Times New Roman" pitchFamily="34" charset="-122"/>
                 <a:cs typeface="Times New Roman" pitchFamily="34" charset="-120"/>
               </a:rPr>
-              <a:t>Fill in the blanks:</a:t>
-            </a:r>
-            <a:endParaRPr lang="en-US" sz="4000" dirty="0"/>
-          </a:p>
-          <a:p>
-            <a:pPr algn="l" marL="342900" indent="-342900">
-              <a:spcAft>
-                <a:spcPts val="800"/>
-              </a:spcAft>
-              <a:buSzPct val="100000"/>
-              <a:buFont typeface="+mj-lt"/>
-              <a:buAutoNum type="arabicPeriod" startAt="1"/>
-            </a:pPr>
-            <a:r>
-              <a:rPr lang="en-US" sz="4000" dirty="0">
-                <a:solidFill>
-                  <a:srgbClr val="111111"/>
-                </a:solidFill>
-                <a:latin typeface="Times New Roman" pitchFamily="34" charset="0"/>
-                <a:ea typeface="Times New Roman" pitchFamily="34" charset="-122"/>
-                <a:cs typeface="Times New Roman" pitchFamily="34" charset="-120"/>
-              </a:rPr>
-              <a:t>The total value of goods and services of a country is the ______.</a:t>
-            </a:r>
-            <a:endParaRPr lang="en-US" sz="4000" dirty="0"/>
-          </a:p>
-          <a:p>
-            <a:pPr algn="l" marL="342900" indent="-342900">
-              <a:spcAft>
-                <a:spcPts val="800"/>
-              </a:spcAft>
-              <a:buSzPct val="100000"/>
-              <a:buFont typeface="+mj-lt"/>
-              <a:buAutoNum type="arabicPeriod" startAt="1"/>
-            </a:pPr>
-            <a:r>
-              <a:rPr lang="en-US" sz="4000" dirty="0">
-                <a:solidFill>
-                  <a:srgbClr val="111111"/>
-                </a:solidFill>
-                <a:latin typeface="Times New Roman" pitchFamily="34" charset="0"/>
-                <a:ea typeface="Times New Roman" pitchFamily="34" charset="-122"/>
-                <a:cs typeface="Times New Roman" pitchFamily="34" charset="-120"/>
-              </a:rPr>
-              <a:t>Chemicals can ______ rivers.</a:t>
-            </a:r>
-            <a:endParaRPr lang="en-US" sz="4000" dirty="0"/>
-          </a:p>
-          <a:p>
-            <a:pPr algn="l" marL="342900" indent="-342900">
-              <a:spcAft>
-                <a:spcPts val="800"/>
-              </a:spcAft>
-              <a:buSzPct val="100000"/>
-              <a:buFont typeface="+mj-lt"/>
-              <a:buAutoNum type="arabicPeriod" startAt="1"/>
-            </a:pPr>
-            <a:r>
-              <a:rPr lang="en-US" sz="4000" dirty="0">
-                <a:solidFill>
-                  <a:srgbClr val="111111"/>
-                </a:solidFill>
-                <a:latin typeface="Times New Roman" pitchFamily="34" charset="0"/>
-                <a:ea typeface="Times New Roman" pitchFamily="34" charset="-122"/>
-                <a:cs typeface="Times New Roman" pitchFamily="34" charset="-120"/>
-              </a:rPr>
-              <a:t>Clearing forests for farms causes ______.</a:t>
+              <a:t>Give two long-term negative effects on the environment.</a:t>
             </a:r>
             <a:endParaRPr lang="en-US" sz="4000" dirty="0"/>
           </a:p>
@@ -16075,7 +16471,7 @@
                 <a:ea typeface="Calibri" pitchFamily="34" charset="-122"/>
                 <a:cs typeface="Calibri" pitchFamily="34" charset="-120"/>
               </a:rPr>
-              <a:t>HOMEWORK</a:t>
+              <a:t>FORMATIVE EVALUATION</a:t>
             </a:r>
             <a:endParaRPr lang="en-US" sz="1400" dirty="0"/>
           </a:p>
@@ -16140,7 +16536,7 @@
                 <a:ea typeface="Times New Roman" pitchFamily="34" charset="-122"/>
                 <a:cs typeface="Times New Roman" pitchFamily="34" charset="-120"/>
               </a:rPr>
-              <a:t>Homework</a:t>
+              <a:t>Expected Answer</a:t>
             </a:r>
             <a:endParaRPr lang="en-US" sz="3600" dirty="0"/>
           </a:p>
@@ -16182,7 +16578,7 @@
                 <a:ea typeface="Times New Roman" pitchFamily="34" charset="-122"/>
                 <a:cs typeface="Times New Roman" pitchFamily="34" charset="-120"/>
               </a:rPr>
-              <a:t>Write one positive and one negative impact of farming in your area.</a:t>
+              <a:t>Soil erosion and deforestation.</a:t>
             </a:r>
             <a:endParaRPr lang="en-US" sz="4000" dirty="0"/>
           </a:p>
@@ -16294,7 +16690,7 @@
                 <a:ea typeface="Calibri" pitchFamily="34" charset="-122"/>
                 <a:cs typeface="Calibri" pitchFamily="34" charset="-120"/>
               </a:rPr>
-              <a:t>NEXT LESSON</a:t>
+              <a:t>REMEDIATION</a:t>
             </a:r>
             <a:endParaRPr lang="en-US" sz="1400" dirty="0"/>
           </a:p>
@@ -16317,7 +16713,7 @@
         <p:spPr>
           <a:xfrm>
             <a:off x="0" y="658368"/>
-            <a:ext cx="5120640" cy="5833872"/>
+            <a:ext cx="2468880" cy="5833872"/>
           </a:xfrm>
           <a:prstGeom prst="rect">
             <a:avLst/>
@@ -16332,8 +16728,8 @@
         </p:nvSpPr>
         <p:spPr>
           <a:xfrm>
-            <a:off x="5349240" y="1005840"/>
-            <a:ext cx="6522415" cy="731520"/>
+            <a:off x="2697480" y="1005840"/>
+            <a:ext cx="9174175" cy="731520"/>
           </a:xfrm>
           <a:prstGeom prst="rect">
             <a:avLst/>
@@ -16359,7 +16755,7 @@
                 <a:ea typeface="Times New Roman" pitchFamily="34" charset="-122"/>
                 <a:cs typeface="Times New Roman" pitchFamily="34" charset="-120"/>
               </a:rPr>
-              <a:t>Next Lesson</a:t>
+              <a:t>Remediation</a:t>
             </a:r>
             <a:endParaRPr lang="en-US" sz="3600" dirty="0"/>
           </a:p>
@@ -16373,8 +16769,8 @@
         </p:nvSpPr>
         <p:spPr>
           <a:xfrm>
-            <a:off x="5349240" y="1783080"/>
-            <a:ext cx="6522415" cy="4663440"/>
+            <a:off x="2697480" y="1783080"/>
+            <a:ext cx="9174175" cy="4663440"/>
           </a:xfrm>
           <a:prstGeom prst="rect">
             <a:avLst/>
@@ -16383,10 +16779,10 @@
           <a:ln/>
         </p:spPr>
         <p:txBody>
-          <a:bodyPr wrap="square" lIns="0" tIns="0" rIns="0" bIns="0" rtlCol="0" anchor="ctr"/>
-          <a:lstStyle/>
-          <a:p>
-            <a:pPr algn="ctr" indent="0" marL="0">
+          <a:bodyPr wrap="square" lIns="0" tIns="0" rIns="0" bIns="0" rtlCol="0" anchor="t"/>
+          <a:lstStyle/>
+          <a:p>
+            <a:pPr algn="l" indent="0" marL="0">
               <a:spcAft>
                 <a:spcPts val="800"/>
               </a:spcAft>
@@ -16401,27 +16797,73 @@
                 <a:ea typeface="Times New Roman" pitchFamily="34" charset="-122"/>
                 <a:cs typeface="Times New Roman" pitchFamily="34" charset="-120"/>
               </a:rPr>
-              <a:t>Our next lesson will be on:</a:t>
+              <a:t>Fill in the blanks:</a:t>
             </a:r>
             <a:endParaRPr lang="en-US" sz="4000" dirty="0"/>
           </a:p>
           <a:p>
-            <a:pPr algn="ctr" indent="0" marL="0">
+            <a:pPr algn="l" marL="342900" indent="-342900">
               <a:spcAft>
                 <a:spcPts val="800"/>
               </a:spcAft>
-              <a:buNone/>
+              <a:buSzPct val="100000"/>
+              <a:buFont typeface="+mj-lt"/>
+              <a:buAutoNum type="arabicPeriod" startAt="1"/>
             </a:pPr>
             <a:r>
-              <a:rPr lang="en-US" sz="4000" b="1" dirty="0">
-                <a:solidFill>
-                  <a:srgbClr val="990011"/>
+              <a:rPr lang="en-US" sz="4000" dirty="0">
+                <a:solidFill>
+                  <a:srgbClr val="111111"/>
                 </a:solidFill>
                 <a:latin typeface="Times New Roman" pitchFamily="34" charset="0"/>
                 <a:ea typeface="Times New Roman" pitchFamily="34" charset="-122"/>
                 <a:cs typeface="Times New Roman" pitchFamily="34" charset="-120"/>
               </a:rPr>
-              <a:t>Lesson 31: Sustainable Agriculture</a:t>
+              <a:t>The total value of goods and services of a country is the ______.</a:t>
+            </a:r>
+            <a:endParaRPr lang="en-US" sz="4000" dirty="0"/>
+          </a:p>
+          <a:p>
+            <a:pPr algn="l" marL="342900" indent="-342900">
+              <a:spcAft>
+                <a:spcPts val="800"/>
+              </a:spcAft>
+              <a:buSzPct val="100000"/>
+              <a:buFont typeface="+mj-lt"/>
+              <a:buAutoNum type="arabicPeriod" startAt="1"/>
+            </a:pPr>
+            <a:r>
+              <a:rPr lang="en-US" sz="4000" dirty="0">
+                <a:solidFill>
+                  <a:srgbClr val="111111"/>
+                </a:solidFill>
+                <a:latin typeface="Times New Roman" pitchFamily="34" charset="0"/>
+                <a:ea typeface="Times New Roman" pitchFamily="34" charset="-122"/>
+                <a:cs typeface="Times New Roman" pitchFamily="34" charset="-120"/>
+              </a:rPr>
+              <a:t>Chemicals can ______ rivers.</a:t>
+            </a:r>
+            <a:endParaRPr lang="en-US" sz="4000" dirty="0"/>
+          </a:p>
+          <a:p>
+            <a:pPr algn="l" marL="342900" indent="-342900">
+              <a:spcAft>
+                <a:spcPts val="800"/>
+              </a:spcAft>
+              <a:buSzPct val="100000"/>
+              <a:buFont typeface="+mj-lt"/>
+              <a:buAutoNum type="arabicPeriod" startAt="1"/>
+            </a:pPr>
+            <a:r>
+              <a:rPr lang="en-US" sz="4000" dirty="0">
+                <a:solidFill>
+                  <a:srgbClr val="111111"/>
+                </a:solidFill>
+                <a:latin typeface="Times New Roman" pitchFamily="34" charset="0"/>
+                <a:ea typeface="Times New Roman" pitchFamily="34" charset="-122"/>
+                <a:cs typeface="Times New Roman" pitchFamily="34" charset="-120"/>
+              </a:rPr>
+              <a:t>Clearing forests for farms causes ______.</a:t>
             </a:r>
             <a:endParaRPr lang="en-US" sz="4000" dirty="0"/>
           </a:p>
@@ -16533,6 +16975,464 @@
                 <a:ea typeface="Calibri" pitchFamily="34" charset="-122"/>
                 <a:cs typeface="Calibri" pitchFamily="34" charset="-120"/>
               </a:rPr>
+              <a:t>HOMEWORK</a:t>
+            </a:r>
+            <a:endParaRPr lang="en-US" sz="1400" dirty="0"/>
+          </a:p>
+        </p:txBody>
+      </p:sp>
+      <p:pic>
+        <p:nvPicPr>
+          <p:cNvPr id="3" name="Image 0" descr="/home/claude/f4/img/minesec_sheet.png">    </p:cNvPr>
+          <p:cNvPicPr>
+            <a:picLocks noChangeAspect="1"/>
+          </p:cNvPicPr>
+          <p:nvPr/>
+        </p:nvPicPr>
+        <p:blipFill>
+          <a:blip r:embed="rId1"/>
+          <a:stretch>
+            <a:fillRect/>
+          </a:stretch>
+        </p:blipFill>
+        <p:spPr>
+          <a:xfrm>
+            <a:off x="0" y="658368"/>
+            <a:ext cx="5120640" cy="5833872"/>
+          </a:xfrm>
+          <a:prstGeom prst="rect">
+            <a:avLst/>
+          </a:prstGeom>
+        </p:spPr>
+      </p:pic>
+      <p:sp>
+        <p:nvSpPr>
+          <p:cNvPr id="4" name="Text 1"/>
+          <p:cNvSpPr/>
+          <p:nvPr/>
+        </p:nvSpPr>
+        <p:spPr>
+          <a:xfrm>
+            <a:off x="5349240" y="1005840"/>
+            <a:ext cx="6522415" cy="731520"/>
+          </a:xfrm>
+          <a:prstGeom prst="rect">
+            <a:avLst/>
+          </a:prstGeom>
+          <a:noFill/>
+          <a:ln/>
+        </p:spPr>
+        <p:txBody>
+          <a:bodyPr wrap="square" lIns="0" tIns="0" rIns="0" bIns="0" rtlCol="0" anchor="ctr">
+            <a:normAutofit/>
+          </a:bodyPr>
+          <a:lstStyle/>
+          <a:p>
+            <a:pPr algn="ctr" indent="0" marL="0">
+              <a:buNone/>
+            </a:pPr>
+            <a:r>
+              <a:rPr lang="en-US" sz="3600" b="1" dirty="0">
+                <a:solidFill>
+                  <a:srgbClr val="990011"/>
+                </a:solidFill>
+                <a:latin typeface="Times New Roman" pitchFamily="34" charset="0"/>
+                <a:ea typeface="Times New Roman" pitchFamily="34" charset="-122"/>
+                <a:cs typeface="Times New Roman" pitchFamily="34" charset="-120"/>
+              </a:rPr>
+              <a:t>Homework</a:t>
+            </a:r>
+            <a:endParaRPr lang="en-US" sz="3600" dirty="0"/>
+          </a:p>
+        </p:txBody>
+      </p:sp>
+      <p:sp>
+        <p:nvSpPr>
+          <p:cNvPr id="5" name="Text 2"/>
+          <p:cNvSpPr/>
+          <p:nvPr/>
+        </p:nvSpPr>
+        <p:spPr>
+          <a:xfrm>
+            <a:off x="5349240" y="1783080"/>
+            <a:ext cx="6522415" cy="4663440"/>
+          </a:xfrm>
+          <a:prstGeom prst="rect">
+            <a:avLst/>
+          </a:prstGeom>
+          <a:noFill/>
+          <a:ln/>
+        </p:spPr>
+        <p:txBody>
+          <a:bodyPr wrap="square" lIns="0" tIns="0" rIns="0" bIns="0" rtlCol="0" anchor="t"/>
+          <a:lstStyle/>
+          <a:p>
+            <a:pPr algn="l" indent="0" marL="0">
+              <a:spcAft>
+                <a:spcPts val="800"/>
+              </a:spcAft>
+              <a:buNone/>
+            </a:pPr>
+            <a:r>
+              <a:rPr lang="en-US" sz="4000" dirty="0">
+                <a:solidFill>
+                  <a:srgbClr val="111111"/>
+                </a:solidFill>
+                <a:latin typeface="Times New Roman" pitchFamily="34" charset="0"/>
+                <a:ea typeface="Times New Roman" pitchFamily="34" charset="-122"/>
+                <a:cs typeface="Times New Roman" pitchFamily="34" charset="-120"/>
+              </a:rPr>
+              <a:t>Write one positive and one negative impact of farming in your area.</a:t>
+            </a:r>
+            <a:endParaRPr lang="en-US" sz="4000" dirty="0"/>
+          </a:p>
+        </p:txBody>
+      </p:sp>
+      <p:sp>
+        <p:nvSpPr>
+          <p:cNvPr id="25" name="Slide Number Placeholder 0"/>
+          <p:cNvSpPr>
+            <a:spLocks noGrp="1"/>
+          </p:cNvSpPr>
+          <p:nvPr>
+            <p:ph type="sldNum" sz="quarter" idx="4294967295"/>
+          </p:nvPr>
+        </p:nvSpPr>
+        <p:spPr>
+          <a:xfrm>
+            <a:off x="27432" y="91440"/>
+            <a:ext cx="585216" cy="475488"/>
+          </a:xfrm>
+          <a:prstGeom prst="rect">
+            <a:avLst/>
+          </a:prstGeom>
+          <a:extLst>
+            <a:ext uri="{C572A759-6A51-4108-AA02-DFA0A04FC94B}">
+              <ma14:wrappingTextBoxFlag xmlns:ma14="http://schemas.microsoft.com/office/mac/drawingml/2011/main" val="0"/>
+            </a:ext>
+          </a:extLst>
+        </p:spPr>
+        <p:txBody>
+          <a:bodyPr/>
+          <a:lstStyle>
+            <a:lvl1pPr>
+              <a:defRPr sz="2000">
+                <a:solidFill>
+                  <a:srgbClr val="FFFFFF"/>
+                </a:solidFill>
+                <a:latin typeface="Calibri"/>
+                <a:ea typeface="Calibri"/>
+                <a:cs typeface="Calibri"/>
+              </a:defRPr>
+            </a:lvl1pPr>
+          </a:lstStyle>
+          <a:p>
+            <a:pPr algn="ctr"/>
+            <a:fld id="{F7021451-1387-4CA6-816F-3879F97B5CBC}" type="slidenum">
+              <a:rPr b="1" lang="en-US"/>
+              <a:t>47</a:t>
+            </a:fld>
+            <a:endParaRPr lang="en-US"/>
+          </a:p>
+        </p:txBody>
+      </p:sp>
+    </p:spTree>
+  </p:cSld>
+  <p:clrMapOvr>
+    <a:masterClrMapping/>
+  </p:clrMapOvr>
+</p:sld>
+</file>
+
+<file path=ppt/slides/slide48.xml><?xml version="1.0" encoding="utf-8"?>
+<p:sld xmlns:a="http://schemas.openxmlformats.org/drawingml/2006/main" xmlns:r="http://schemas.openxmlformats.org/officeDocument/2006/relationships" xmlns:p="http://schemas.openxmlformats.org/presentationml/2006/main">
+  <p:cSld name="Slide 48">
+    <p:spTree>
+      <p:nvGrpSpPr>
+        <p:cNvPr id="1" name=""/>
+        <p:cNvGrpSpPr/>
+        <p:nvPr/>
+      </p:nvGrpSpPr>
+      <p:grpSpPr>
+        <a:xfrm>
+          <a:off x="0" y="0"/>
+          <a:ext cx="0" cy="0"/>
+          <a:chOff x="0" y="0"/>
+          <a:chExt cx="0" cy="0"/>
+        </a:xfrm>
+      </p:grpSpPr>
+      <p:sp>
+        <p:nvSpPr>
+          <p:cNvPr id="2" name="Text 0"/>
+          <p:cNvSpPr/>
+          <p:nvPr/>
+        </p:nvSpPr>
+        <p:spPr>
+          <a:xfrm>
+            <a:off x="457200" y="713232"/>
+            <a:ext cx="11368735" cy="274320"/>
+          </a:xfrm>
+          <a:prstGeom prst="rect">
+            <a:avLst/>
+          </a:prstGeom>
+          <a:noFill/>
+          <a:ln/>
+        </p:spPr>
+        <p:txBody>
+          <a:bodyPr wrap="square" lIns="0" tIns="0" rIns="0" bIns="0" rtlCol="0" anchor="ctr"/>
+          <a:lstStyle/>
+          <a:p>
+            <a:pPr algn="r" indent="0" marL="0">
+              <a:buNone/>
+            </a:pPr>
+            <a:r>
+              <a:rPr lang="en-US" sz="1400" b="1" dirty="0">
+                <a:solidFill>
+                  <a:srgbClr val="1C3F6E"/>
+                </a:solidFill>
+                <a:latin typeface="Calibri" pitchFamily="34" charset="0"/>
+                <a:ea typeface="Calibri" pitchFamily="34" charset="-122"/>
+                <a:cs typeface="Calibri" pitchFamily="34" charset="-120"/>
+              </a:rPr>
+              <a:t>NEXT LESSON</a:t>
+            </a:r>
+            <a:endParaRPr lang="en-US" sz="1400" dirty="0"/>
+          </a:p>
+        </p:txBody>
+      </p:sp>
+      <p:pic>
+        <p:nvPicPr>
+          <p:cNvPr id="3" name="Image 0" descr="/home/claude/f4/img/minesec_sheet.png">    </p:cNvPr>
+          <p:cNvPicPr>
+            <a:picLocks noChangeAspect="1"/>
+          </p:cNvPicPr>
+          <p:nvPr/>
+        </p:nvPicPr>
+        <p:blipFill>
+          <a:blip r:embed="rId1"/>
+          <a:stretch>
+            <a:fillRect/>
+          </a:stretch>
+        </p:blipFill>
+        <p:spPr>
+          <a:xfrm>
+            <a:off x="0" y="658368"/>
+            <a:ext cx="5120640" cy="5833872"/>
+          </a:xfrm>
+          <a:prstGeom prst="rect">
+            <a:avLst/>
+          </a:prstGeom>
+        </p:spPr>
+      </p:pic>
+      <p:sp>
+        <p:nvSpPr>
+          <p:cNvPr id="4" name="Text 1"/>
+          <p:cNvSpPr/>
+          <p:nvPr/>
+        </p:nvSpPr>
+        <p:spPr>
+          <a:xfrm>
+            <a:off x="5349240" y="1005840"/>
+            <a:ext cx="6522415" cy="731520"/>
+          </a:xfrm>
+          <a:prstGeom prst="rect">
+            <a:avLst/>
+          </a:prstGeom>
+          <a:noFill/>
+          <a:ln/>
+        </p:spPr>
+        <p:txBody>
+          <a:bodyPr wrap="square" lIns="0" tIns="0" rIns="0" bIns="0" rtlCol="0" anchor="ctr">
+            <a:normAutofit/>
+          </a:bodyPr>
+          <a:lstStyle/>
+          <a:p>
+            <a:pPr algn="ctr" indent="0" marL="0">
+              <a:buNone/>
+            </a:pPr>
+            <a:r>
+              <a:rPr lang="en-US" sz="3600" b="1" dirty="0">
+                <a:solidFill>
+                  <a:srgbClr val="990011"/>
+                </a:solidFill>
+                <a:latin typeface="Times New Roman" pitchFamily="34" charset="0"/>
+                <a:ea typeface="Times New Roman" pitchFamily="34" charset="-122"/>
+                <a:cs typeface="Times New Roman" pitchFamily="34" charset="-120"/>
+              </a:rPr>
+              <a:t>Next Lesson</a:t>
+            </a:r>
+            <a:endParaRPr lang="en-US" sz="3600" dirty="0"/>
+          </a:p>
+        </p:txBody>
+      </p:sp>
+      <p:sp>
+        <p:nvSpPr>
+          <p:cNvPr id="5" name="Text 2"/>
+          <p:cNvSpPr/>
+          <p:nvPr/>
+        </p:nvSpPr>
+        <p:spPr>
+          <a:xfrm>
+            <a:off x="5349240" y="1783080"/>
+            <a:ext cx="6522415" cy="4663440"/>
+          </a:xfrm>
+          <a:prstGeom prst="rect">
+            <a:avLst/>
+          </a:prstGeom>
+          <a:noFill/>
+          <a:ln/>
+        </p:spPr>
+        <p:txBody>
+          <a:bodyPr wrap="square" lIns="0" tIns="0" rIns="0" bIns="0" rtlCol="0" anchor="ctr"/>
+          <a:lstStyle/>
+          <a:p>
+            <a:pPr algn="ctr" indent="0" marL="0">
+              <a:spcAft>
+                <a:spcPts val="800"/>
+              </a:spcAft>
+              <a:buNone/>
+            </a:pPr>
+            <a:r>
+              <a:rPr lang="en-US" sz="4000" b="1" dirty="0">
+                <a:solidFill>
+                  <a:srgbClr val="111111"/>
+                </a:solidFill>
+                <a:latin typeface="Times New Roman" pitchFamily="34" charset="0"/>
+                <a:ea typeface="Times New Roman" pitchFamily="34" charset="-122"/>
+                <a:cs typeface="Times New Roman" pitchFamily="34" charset="-120"/>
+              </a:rPr>
+              <a:t>Our next lesson will be on:</a:t>
+            </a:r>
+            <a:endParaRPr lang="en-US" sz="4000" dirty="0"/>
+          </a:p>
+          <a:p>
+            <a:pPr algn="ctr" indent="0" marL="0">
+              <a:spcAft>
+                <a:spcPts val="800"/>
+              </a:spcAft>
+              <a:buNone/>
+            </a:pPr>
+            <a:r>
+              <a:rPr lang="en-US" sz="4000" b="1" dirty="0">
+                <a:solidFill>
+                  <a:srgbClr val="990011"/>
+                </a:solidFill>
+                <a:latin typeface="Times New Roman" pitchFamily="34" charset="0"/>
+                <a:ea typeface="Times New Roman" pitchFamily="34" charset="-122"/>
+                <a:cs typeface="Times New Roman" pitchFamily="34" charset="-120"/>
+              </a:rPr>
+              <a:t>Lesson 31: Sustainable Agriculture</a:t>
+            </a:r>
+            <a:endParaRPr lang="en-US" sz="4000" dirty="0"/>
+          </a:p>
+        </p:txBody>
+      </p:sp>
+      <p:sp>
+        <p:nvSpPr>
+          <p:cNvPr id="25" name="Slide Number Placeholder 0"/>
+          <p:cNvSpPr>
+            <a:spLocks noGrp="1"/>
+          </p:cNvSpPr>
+          <p:nvPr>
+            <p:ph type="sldNum" sz="quarter" idx="4294967295"/>
+          </p:nvPr>
+        </p:nvSpPr>
+        <p:spPr>
+          <a:xfrm>
+            <a:off x="27432" y="91440"/>
+            <a:ext cx="585216" cy="475488"/>
+          </a:xfrm>
+          <a:prstGeom prst="rect">
+            <a:avLst/>
+          </a:prstGeom>
+          <a:extLst>
+            <a:ext uri="{C572A759-6A51-4108-AA02-DFA0A04FC94B}">
+              <ma14:wrappingTextBoxFlag xmlns:ma14="http://schemas.microsoft.com/office/mac/drawingml/2011/main" val="0"/>
+            </a:ext>
+          </a:extLst>
+        </p:spPr>
+        <p:txBody>
+          <a:bodyPr/>
+          <a:lstStyle>
+            <a:lvl1pPr>
+              <a:defRPr sz="2000">
+                <a:solidFill>
+                  <a:srgbClr val="FFFFFF"/>
+                </a:solidFill>
+                <a:latin typeface="Calibri"/>
+                <a:ea typeface="Calibri"/>
+                <a:cs typeface="Calibri"/>
+              </a:defRPr>
+            </a:lvl1pPr>
+          </a:lstStyle>
+          <a:p>
+            <a:pPr algn="ctr"/>
+            <a:fld id="{F7021451-1387-4CA6-816F-3879F97B5CBC}" type="slidenum">
+              <a:rPr b="1" lang="en-US"/>
+              <a:t>48</a:t>
+            </a:fld>
+            <a:endParaRPr lang="en-US"/>
+          </a:p>
+        </p:txBody>
+      </p:sp>
+    </p:spTree>
+  </p:cSld>
+  <p:clrMapOvr>
+    <a:masterClrMapping/>
+  </p:clrMapOvr>
+</p:sld>
+</file>
+
+<file path=ppt/slides/slide49.xml><?xml version="1.0" encoding="utf-8"?>
+<p:sld xmlns:a="http://schemas.openxmlformats.org/drawingml/2006/main" xmlns:r="http://schemas.openxmlformats.org/officeDocument/2006/relationships" xmlns:p="http://schemas.openxmlformats.org/presentationml/2006/main">
+  <p:cSld name="Slide 49">
+    <p:spTree>
+      <p:nvGrpSpPr>
+        <p:cNvPr id="1" name=""/>
+        <p:cNvGrpSpPr/>
+        <p:nvPr/>
+      </p:nvGrpSpPr>
+      <p:grpSpPr>
+        <a:xfrm>
+          <a:off x="0" y="0"/>
+          <a:ext cx="0" cy="0"/>
+          <a:chOff x="0" y="0"/>
+          <a:chExt cx="0" cy="0"/>
+        </a:xfrm>
+      </p:grpSpPr>
+      <p:sp>
+        <p:nvSpPr>
+          <p:cNvPr id="2" name="Text 0"/>
+          <p:cNvSpPr/>
+          <p:nvPr/>
+        </p:nvSpPr>
+        <p:spPr>
+          <a:xfrm>
+            <a:off x="457200" y="713232"/>
+            <a:ext cx="11368735" cy="274320"/>
+          </a:xfrm>
+          <a:prstGeom prst="rect">
+            <a:avLst/>
+          </a:prstGeom>
+          <a:noFill/>
+          <a:ln/>
+        </p:spPr>
+        <p:txBody>
+          <a:bodyPr wrap="square" lIns="0" tIns="0" rIns="0" bIns="0" rtlCol="0" anchor="ctr"/>
+          <a:lstStyle/>
+          <a:p>
+            <a:pPr algn="r" indent="0" marL="0">
+              <a:buNone/>
+            </a:pPr>
+            <a:r>
+              <a:rPr lang="en-US" sz="1400" b="1" dirty="0">
+                <a:solidFill>
+                  <a:srgbClr val="1C3F6E"/>
+                </a:solidFill>
+                <a:latin typeface="Calibri" pitchFamily="34" charset="0"/>
+                <a:ea typeface="Calibri" pitchFamily="34" charset="-122"/>
+                <a:cs typeface="Calibri" pitchFamily="34" charset="-120"/>
+              </a:rPr>
               <a:t>BILINGUAL GAME</a:t>
             </a:r>
             <a:endParaRPr lang="en-US" sz="1400" dirty="0"/>
@@ -16580,7 +17480,7 @@
       </p:sp>
       <p:graphicFrame>
         <p:nvGraphicFramePr>
-          <p:cNvPr id="48" name="Table 0"/>
+          <p:cNvPr id="50" name="Table 0"/>
           <p:cNvGraphicFramePr>
             <a:graphicFrameLocks noGrp="1"/>
           </p:cNvGraphicFramePr>
@@ -17616,7 +18516,7 @@
             <a:pPr algn="ctr"/>
             <a:fld id="{F7021451-1387-4CA6-816F-3879F97B5CBC}" type="slidenum">
               <a:rPr b="1" lang="en-US"/>
-              <a:t>47</a:t>
+              <a:t>49</a:t>
             </a:fld>
             <a:endParaRPr lang="en-US"/>
           </a:p>
@@ -17630,9 +18530,9 @@
 </p:sld>
 </file>
 
-<file path=ppt/slides/slide48.xml><?xml version="1.0" encoding="utf-8"?>
+<file path=ppt/slides/slide5.xml><?xml version="1.0" encoding="utf-8"?>
 <p:sld xmlns:a="http://schemas.openxmlformats.org/drawingml/2006/main" xmlns:r="http://schemas.openxmlformats.org/officeDocument/2006/relationships" xmlns:p="http://schemas.openxmlformats.org/presentationml/2006/main">
-  <p:cSld name="Slide 48">
+  <p:cSld name="Slide 5">
     <p:spTree>
       <p:nvGrpSpPr>
         <p:cNvPr id="1" name=""/>
@@ -17680,6 +18580,225 @@
                 <a:ea typeface="Calibri" pitchFamily="34" charset="-122"/>
                 <a:cs typeface="Calibri" pitchFamily="34" charset="-120"/>
               </a:rPr>
+              <a:t>HOMEWORK CORRECTION</a:t>
+            </a:r>
+            <a:endParaRPr lang="en-US" sz="1400" dirty="0"/>
+          </a:p>
+        </p:txBody>
+      </p:sp>
+      <p:pic>
+        <p:nvPicPr>
+          <p:cNvPr id="3" name="Image 0" descr="/home/claude/f4/img/minesec_sheet.png">    </p:cNvPr>
+          <p:cNvPicPr>
+            <a:picLocks noChangeAspect="1"/>
+          </p:cNvPicPr>
+          <p:nvPr/>
+        </p:nvPicPr>
+        <p:blipFill>
+          <a:blip r:embed="rId1"/>
+          <a:stretch>
+            <a:fillRect/>
+          </a:stretch>
+        </p:blipFill>
+        <p:spPr>
+          <a:xfrm>
+            <a:off x="0" y="658368"/>
+            <a:ext cx="5120640" cy="5833872"/>
+          </a:xfrm>
+          <a:prstGeom prst="rect">
+            <a:avLst/>
+          </a:prstGeom>
+        </p:spPr>
+      </p:pic>
+      <p:sp>
+        <p:nvSpPr>
+          <p:cNvPr id="4" name="Text 1"/>
+          <p:cNvSpPr/>
+          <p:nvPr/>
+        </p:nvSpPr>
+        <p:spPr>
+          <a:xfrm>
+            <a:off x="5349240" y="1005840"/>
+            <a:ext cx="6522415" cy="731520"/>
+          </a:xfrm>
+          <a:prstGeom prst="rect">
+            <a:avLst/>
+          </a:prstGeom>
+          <a:noFill/>
+          <a:ln/>
+        </p:spPr>
+        <p:txBody>
+          <a:bodyPr wrap="square" lIns="0" tIns="0" rIns="0" bIns="0" rtlCol="0" anchor="ctr">
+            <a:normAutofit/>
+          </a:bodyPr>
+          <a:lstStyle/>
+          <a:p>
+            <a:pPr algn="ctr" indent="0" marL="0">
+              <a:buNone/>
+            </a:pPr>
+            <a:r>
+              <a:rPr lang="en-US" sz="3600" b="1" dirty="0">
+                <a:solidFill>
+                  <a:srgbClr val="990011"/>
+                </a:solidFill>
+                <a:latin typeface="Times New Roman" pitchFamily="34" charset="0"/>
+                <a:ea typeface="Times New Roman" pitchFamily="34" charset="-122"/>
+                <a:cs typeface="Times New Roman" pitchFamily="34" charset="-120"/>
+              </a:rPr>
+              <a:t>Correction: Possible Answer</a:t>
+            </a:r>
+            <a:endParaRPr lang="en-US" sz="3600" dirty="0"/>
+          </a:p>
+        </p:txBody>
+      </p:sp>
+      <p:sp>
+        <p:nvSpPr>
+          <p:cNvPr id="5" name="Text 2"/>
+          <p:cNvSpPr/>
+          <p:nvPr/>
+        </p:nvSpPr>
+        <p:spPr>
+          <a:xfrm>
+            <a:off x="5349240" y="1783080"/>
+            <a:ext cx="6522415" cy="4663440"/>
+          </a:xfrm>
+          <a:prstGeom prst="rect">
+            <a:avLst/>
+          </a:prstGeom>
+          <a:noFill/>
+          <a:ln/>
+        </p:spPr>
+        <p:txBody>
+          <a:bodyPr wrap="square" lIns="0" tIns="0" rIns="0" bIns="0" rtlCol="0" anchor="t"/>
+          <a:lstStyle/>
+          <a:p>
+            <a:pPr algn="l" indent="0" marL="0">
+              <a:spcAft>
+                <a:spcPts val="800"/>
+              </a:spcAft>
+              <a:buNone/>
+            </a:pPr>
+            <a:r>
+              <a:rPr lang="en-US" sz="4000" dirty="0">
+                <a:solidFill>
+                  <a:srgbClr val="111111"/>
+                </a:solidFill>
+                <a:latin typeface="Times New Roman" pitchFamily="34" charset="0"/>
+                <a:ea typeface="Times New Roman" pitchFamily="34" charset="-122"/>
+                <a:cs typeface="Times New Roman" pitchFamily="34" charset="-120"/>
+              </a:rPr>
+              <a:t>Answers vary. Example: a farmer uses improved maize seeds and NPK fertiliser; his harvest rose from 1 to 3 tonnes per hectare, but the inputs are expensive.</a:t>
+            </a:r>
+            <a:endParaRPr lang="en-US" sz="4000" dirty="0"/>
+          </a:p>
+        </p:txBody>
+      </p:sp>
+      <p:sp>
+        <p:nvSpPr>
+          <p:cNvPr id="25" name="Slide Number Placeholder 0"/>
+          <p:cNvSpPr>
+            <a:spLocks noGrp="1"/>
+          </p:cNvSpPr>
+          <p:nvPr>
+            <p:ph type="sldNum" sz="quarter" idx="4294967295"/>
+          </p:nvPr>
+        </p:nvSpPr>
+        <p:spPr>
+          <a:xfrm>
+            <a:off x="27432" y="91440"/>
+            <a:ext cx="585216" cy="475488"/>
+          </a:xfrm>
+          <a:prstGeom prst="rect">
+            <a:avLst/>
+          </a:prstGeom>
+          <a:extLst>
+            <a:ext uri="{C572A759-6A51-4108-AA02-DFA0A04FC94B}">
+              <ma14:wrappingTextBoxFlag xmlns:ma14="http://schemas.microsoft.com/office/mac/drawingml/2011/main" val="0"/>
+            </a:ext>
+          </a:extLst>
+        </p:spPr>
+        <p:txBody>
+          <a:bodyPr/>
+          <a:lstStyle>
+            <a:lvl1pPr>
+              <a:defRPr sz="2000">
+                <a:solidFill>
+                  <a:srgbClr val="FFFFFF"/>
+                </a:solidFill>
+                <a:latin typeface="Calibri"/>
+                <a:ea typeface="Calibri"/>
+                <a:cs typeface="Calibri"/>
+              </a:defRPr>
+            </a:lvl1pPr>
+          </a:lstStyle>
+          <a:p>
+            <a:pPr algn="ctr"/>
+            <a:fld id="{F7021451-1387-4CA6-816F-3879F97B5CBC}" type="slidenum">
+              <a:rPr b="1" lang="en-US"/>
+              <a:t>5</a:t>
+            </a:fld>
+            <a:endParaRPr lang="en-US"/>
+          </a:p>
+        </p:txBody>
+      </p:sp>
+    </p:spTree>
+  </p:cSld>
+  <p:clrMapOvr>
+    <a:masterClrMapping/>
+  </p:clrMapOvr>
+</p:sld>
+</file>
+
+<file path=ppt/slides/slide50.xml><?xml version="1.0" encoding="utf-8"?>
+<p:sld xmlns:a="http://schemas.openxmlformats.org/drawingml/2006/main" xmlns:r="http://schemas.openxmlformats.org/officeDocument/2006/relationships" xmlns:p="http://schemas.openxmlformats.org/presentationml/2006/main">
+  <p:cSld name="Slide 50">
+    <p:spTree>
+      <p:nvGrpSpPr>
+        <p:cNvPr id="1" name=""/>
+        <p:cNvGrpSpPr/>
+        <p:nvPr/>
+      </p:nvGrpSpPr>
+      <p:grpSpPr>
+        <a:xfrm>
+          <a:off x="0" y="0"/>
+          <a:ext cx="0" cy="0"/>
+          <a:chOff x="0" y="0"/>
+          <a:chExt cx="0" cy="0"/>
+        </a:xfrm>
+      </p:grpSpPr>
+      <p:sp>
+        <p:nvSpPr>
+          <p:cNvPr id="2" name="Text 0"/>
+          <p:cNvSpPr/>
+          <p:nvPr/>
+        </p:nvSpPr>
+        <p:spPr>
+          <a:xfrm>
+            <a:off x="457200" y="713232"/>
+            <a:ext cx="11368735" cy="274320"/>
+          </a:xfrm>
+          <a:prstGeom prst="rect">
+            <a:avLst/>
+          </a:prstGeom>
+          <a:noFill/>
+          <a:ln/>
+        </p:spPr>
+        <p:txBody>
+          <a:bodyPr wrap="square" lIns="0" tIns="0" rIns="0" bIns="0" rtlCol="0" anchor="ctr"/>
+          <a:lstStyle/>
+          <a:p>
+            <a:pPr algn="r" indent="0" marL="0">
+              <a:buNone/>
+            </a:pPr>
+            <a:r>
+              <a:rPr lang="en-US" sz="1400" b="1" dirty="0">
+                <a:solidFill>
+                  <a:srgbClr val="1C3F6E"/>
+                </a:solidFill>
+                <a:latin typeface="Calibri" pitchFamily="34" charset="0"/>
+                <a:ea typeface="Calibri" pitchFamily="34" charset="-122"/>
+                <a:cs typeface="Calibri" pitchFamily="34" charset="-120"/>
+              </a:rPr>
               <a:t>LOGBOOK</a:t>
             </a:r>
             <a:endParaRPr lang="en-US" sz="1400" dirty="0"/>
@@ -17727,7 +18846,7 @@
       </p:sp>
       <p:graphicFrame>
         <p:nvGraphicFramePr>
-          <p:cNvPr id="49" name="Table 0"/>
+          <p:cNvPr id="51" name="Table 0"/>
           <p:cNvGraphicFramePr>
             <a:graphicFrameLocks noGrp="1"/>
           </p:cNvGraphicFramePr>
@@ -18349,7 +19468,7 @@
             <a:pPr algn="ctr"/>
             <a:fld id="{F7021451-1387-4CA6-816F-3879F97B5CBC}" type="slidenum">
               <a:rPr b="1" lang="en-US"/>
-              <a:t>48</a:t>
+              <a:t>50</a:t>
             </a:fld>
             <a:endParaRPr lang="en-US"/>
           </a:p>
@@ -18363,9 +19482,9 @@
 </p:sld>
 </file>
 
-<file path=ppt/slides/slide49.xml><?xml version="1.0" encoding="utf-8"?>
+<file path=ppt/slides/slide51.xml><?xml version="1.0" encoding="utf-8"?>
 <p:sld xmlns:a="http://schemas.openxmlformats.org/drawingml/2006/main" xmlns:r="http://schemas.openxmlformats.org/officeDocument/2006/relationships" xmlns:p="http://schemas.openxmlformats.org/presentationml/2006/main">
-  <p:cSld name="Slide 49">
+  <p:cSld name="Slide 51">
     <p:spTree>
       <p:nvGrpSpPr>
         <p:cNvPr id="1" name=""/>
@@ -18460,7 +19579,7 @@
       </p:sp>
       <p:graphicFrame>
         <p:nvGraphicFramePr>
-          <p:cNvPr id="50" name="Table 0"/>
+          <p:cNvPr id="52" name="Table 0"/>
           <p:cNvGraphicFramePr>
             <a:graphicFrameLocks noGrp="1"/>
           </p:cNvGraphicFramePr>
@@ -18570,7 +19689,7 @@
                           <a:ea typeface="Calibri" pitchFamily="34" charset="-122"/>
                           <a:cs typeface="Calibri" pitchFamily="34" charset="-120"/>
                         </a:rPr>
-                        <a:t>Impact on the Economy; Impact on the Environment.</a:t>
+                        <a:t>Impact on the Economy; Negative Effects; Positive Effects.</a:t>
                       </a:r>
                       <a:endParaRPr lang="en-US" sz="1600" dirty="0">
                         <a:latin typeface="Calibri" charset="0"/>
@@ -19220,7 +20339,7 @@
             <a:pPr algn="ctr"/>
             <a:fld id="{F7021451-1387-4CA6-816F-3879F97B5CBC}" type="slidenum">
               <a:rPr b="1" lang="en-US"/>
-              <a:t>49</a:t>
+              <a:t>51</a:t>
             </a:fld>
             <a:endParaRPr lang="en-US"/>
           </a:p>
@@ -19234,9 +20353,9 @@
 </p:sld>
 </file>
 
-<file path=ppt/slides/slide5.xml><?xml version="1.0" encoding="utf-8"?>
+<file path=ppt/slides/slide52.xml><?xml version="1.0" encoding="utf-8"?>
 <p:sld xmlns:a="http://schemas.openxmlformats.org/drawingml/2006/main" xmlns:r="http://schemas.openxmlformats.org/officeDocument/2006/relationships" xmlns:p="http://schemas.openxmlformats.org/presentationml/2006/main">
-  <p:cSld name="Slide 5">
+  <p:cSld name="Slide 52">
     <p:spTree>
       <p:nvGrpSpPr>
         <p:cNvPr id="1" name=""/>
@@ -19284,7 +20403,7 @@
                 <a:ea typeface="Calibri" pitchFamily="34" charset="-122"/>
                 <a:cs typeface="Calibri" pitchFamily="34" charset="-120"/>
               </a:rPr>
-              <a:t>HOMEWORK CORRECTION</a:t>
+              <a:t>TEACHER'S NOTE</a:t>
             </a:r>
             <a:endParaRPr lang="en-US" sz="1400" dirty="0"/>
           </a:p>
@@ -19349,7 +20468,7 @@
                 <a:ea typeface="Times New Roman" pitchFamily="34" charset="-122"/>
                 <a:cs typeface="Times New Roman" pitchFamily="34" charset="-120"/>
               </a:rPr>
-              <a:t>Correction: Possible Answer</a:t>
+              <a:t>Teacher's Note</a:t>
             </a:r>
             <a:endParaRPr lang="en-US" sz="3600" dirty="0"/>
           </a:p>
@@ -19376,24 +20495,130 @@
           <a:bodyPr wrap="square" lIns="0" tIns="0" rIns="0" bIns="0" rtlCol="0" anchor="t"/>
           <a:lstStyle/>
           <a:p>
-            <a:pPr algn="l" indent="0" marL="0">
+            <a:pPr algn="l" marL="342900" indent="-342900">
               <a:spcAft>
                 <a:spcPts val="800"/>
               </a:spcAft>
-              <a:buNone/>
+              <a:buSzPct val="100000"/>
+              <a:buChar char="•"/>
             </a:pPr>
             <a:r>
-              <a:rPr lang="en-US" sz="4000" dirty="0">
+              <a:rPr lang="en-US" sz="2000" dirty="0">
                 <a:solidFill>
                   <a:srgbClr val="111111"/>
                 </a:solidFill>
-                <a:latin typeface="Times New Roman" pitchFamily="34" charset="0"/>
-                <a:ea typeface="Times New Roman" pitchFamily="34" charset="-122"/>
-                <a:cs typeface="Times New Roman" pitchFamily="34" charset="-120"/>
+                <a:latin typeface="Calibri" pitchFamily="34" charset="0"/>
+                <a:ea typeface="Calibri" pitchFamily="34" charset="-122"/>
+                <a:cs typeface="Calibri" pitchFamily="34" charset="-120"/>
               </a:rPr>
-              <a:t>Answers vary. Example: a farmer uses improved maize seeds and NPK fertiliser; his harvest rose from 1 to 3 tonnes per hectare, but the inputs are expensive.</a:t>
-            </a:r>
-            <a:endParaRPr lang="en-US" sz="4000" dirty="0"/>
+              <a:t>Timing: Homework correction, plan, objectives 8 min | Recall, situation, action 10 min | 5 activities 30 min | Board summary (copying) 30 min | Evaluation, remediation 10 min | Homework, next lesson 5 min | Logbook 7 min</a:t>
+            </a:r>
+            <a:endParaRPr lang="en-US" sz="2000" dirty="0"/>
+          </a:p>
+          <a:p>
+            <a:pPr algn="l" marL="342900" indent="-342900">
+              <a:spcAft>
+                <a:spcPts val="800"/>
+              </a:spcAft>
+              <a:buSzPct val="100000"/>
+              <a:buChar char="•"/>
+            </a:pPr>
+            <a:r>
+              <a:rPr lang="en-US" sz="2000" dirty="0">
+                <a:solidFill>
+                  <a:srgbClr val="111111"/>
+                </a:solidFill>
+                <a:latin typeface="Calibri" pitchFamily="34" charset="0"/>
+                <a:ea typeface="Calibri" pitchFamily="34" charset="-122"/>
+                <a:cs typeface="Calibri" pitchFamily="34" charset="-120"/>
+              </a:rPr>
+              <a:t>Without the projector (Activity 1): list exports.</a:t>
+            </a:r>
+            <a:endParaRPr lang="en-US" sz="2000" dirty="0"/>
+          </a:p>
+          <a:p>
+            <a:pPr algn="l" marL="342900" indent="-342900">
+              <a:spcAft>
+                <a:spcPts val="800"/>
+              </a:spcAft>
+              <a:buSzPct val="100000"/>
+              <a:buChar char="•"/>
+            </a:pPr>
+            <a:r>
+              <a:rPr lang="en-US" sz="2000" dirty="0">
+                <a:solidFill>
+                  <a:srgbClr val="111111"/>
+                </a:solidFill>
+                <a:latin typeface="Calibri" pitchFamily="34" charset="0"/>
+                <a:ea typeface="Calibri" pitchFamily="34" charset="-122"/>
+                <a:cs typeface="Calibri" pitchFamily="34" charset="-120"/>
+              </a:rPr>
+              <a:t>Without the projector (Activity 2): name agro-industries.</a:t>
+            </a:r>
+            <a:endParaRPr lang="en-US" sz="2000" dirty="0"/>
+          </a:p>
+          <a:p>
+            <a:pPr algn="l" marL="342900" indent="-342900">
+              <a:spcAft>
+                <a:spcPts val="800"/>
+              </a:spcAft>
+              <a:buSzPct val="100000"/>
+              <a:buChar char="•"/>
+            </a:pPr>
+            <a:r>
+              <a:rPr lang="en-US" sz="2000" dirty="0">
+                <a:solidFill>
+                  <a:srgbClr val="111111"/>
+                </a:solidFill>
+                <a:latin typeface="Calibri" pitchFamily="34" charset="0"/>
+                <a:ea typeface="Calibri" pitchFamily="34" charset="-122"/>
+                <a:cs typeface="Calibri" pitchFamily="34" charset="-120"/>
+              </a:rPr>
+              <a:t>Without the projector (Activity 3): discuss.</a:t>
+            </a:r>
+            <a:endParaRPr lang="en-US" sz="2000" dirty="0"/>
+          </a:p>
+          <a:p>
+            <a:pPr algn="l" marL="342900" indent="-342900">
+              <a:spcAft>
+                <a:spcPts val="800"/>
+              </a:spcAft>
+              <a:buSzPct val="100000"/>
+              <a:buChar char="•"/>
+            </a:pPr>
+            <a:r>
+              <a:rPr lang="en-US" sz="2000" dirty="0">
+                <a:solidFill>
+                  <a:srgbClr val="111111"/>
+                </a:solidFill>
+                <a:latin typeface="Calibri" pitchFamily="34" charset="0"/>
+                <a:ea typeface="Calibri" pitchFamily="34" charset="-122"/>
+                <a:cs typeface="Calibri" pitchFamily="34" charset="-120"/>
+              </a:rPr>
+              <a:t>Without the projector (Activity 4): discuss.</a:t>
+            </a:r>
+            <a:endParaRPr lang="en-US" sz="2000" dirty="0"/>
+          </a:p>
+          <a:p>
+            <a:pPr algn="l" marL="342900" indent="-342900">
+              <a:spcAft>
+                <a:spcPts val="800"/>
+              </a:spcAft>
+              <a:buSzPct val="100000"/>
+              <a:buChar char="•"/>
+            </a:pPr>
+            <a:r>
+              <a:rPr lang="en-US" sz="2000" dirty="0">
+                <a:solidFill>
+                  <a:srgbClr val="111111"/>
+                </a:solidFill>
+                <a:latin typeface="Calibri" pitchFamily="34" charset="0"/>
+                <a:ea typeface="Calibri" pitchFamily="34" charset="-122"/>
+                <a:cs typeface="Calibri" pitchFamily="34" charset="-120"/>
+              </a:rPr>
+              <a:t>Without the projector (Activity 5): read the table.</a:t>
+            </a:r>
+            <a:endParaRPr lang="en-US" sz="2000" dirty="0"/>
           </a:p>
         </p:txBody>
       </p:sp>
@@ -19439,7 +20664,7 @@
             <a:pPr algn="ctr"/>
             <a:fld id="{F7021451-1387-4CA6-816F-3879F97B5CBC}" type="slidenum">
               <a:rPr b="1" lang="en-US"/>
-              <a:t>5</a:t>
+              <a:t>52</a:t>
             </a:fld>
             <a:endParaRPr lang="en-US"/>
           </a:p>
@@ -19453,9 +20678,9 @@
 </p:sld>
 </file>
 
-<file path=ppt/slides/slide50.xml><?xml version="1.0" encoding="utf-8"?>
+<file path=ppt/slides/slide53.xml><?xml version="1.0" encoding="utf-8"?>
 <p:sld xmlns:a="http://schemas.openxmlformats.org/drawingml/2006/main" xmlns:r="http://schemas.openxmlformats.org/officeDocument/2006/relationships" xmlns:p="http://schemas.openxmlformats.org/presentationml/2006/main">
-  <p:cSld name="Slide 50">
+  <p:cSld name="Slide 53">
     <p:spTree>
       <p:nvGrpSpPr>
         <p:cNvPr id="1" name=""/>
@@ -19503,7 +20728,7 @@
                 <a:ea typeface="Calibri" pitchFamily="34" charset="-122"/>
                 <a:cs typeface="Calibri" pitchFamily="34" charset="-120"/>
               </a:rPr>
-              <a:t>TEACHER'S NOTE</a:t>
+              <a:t>REFERENCES</a:t>
             </a:r>
             <a:endParaRPr lang="en-US" sz="1400" dirty="0"/>
           </a:p>
@@ -19526,7 +20751,7 @@
         <p:spPr>
           <a:xfrm>
             <a:off x="0" y="658368"/>
-            <a:ext cx="5120640" cy="5833872"/>
+            <a:ext cx="3840480" cy="5833872"/>
           </a:xfrm>
           <a:prstGeom prst="rect">
             <a:avLst/>
@@ -19541,8 +20766,8 @@
         </p:nvSpPr>
         <p:spPr>
           <a:xfrm>
-            <a:off x="5349240" y="1005840"/>
-            <a:ext cx="6522415" cy="731520"/>
+            <a:off x="4069080" y="1005840"/>
+            <a:ext cx="7802575" cy="731520"/>
           </a:xfrm>
           <a:prstGeom prst="rect">
             <a:avLst/>
@@ -19568,7 +20793,7 @@
                 <a:ea typeface="Times New Roman" pitchFamily="34" charset="-122"/>
                 <a:cs typeface="Times New Roman" pitchFamily="34" charset="-120"/>
               </a:rPr>
-              <a:t>Teacher's Note</a:t>
+              <a:t>References</a:t>
             </a:r>
             <a:endParaRPr lang="en-US" sz="3600" dirty="0"/>
           </a:p>
@@ -19582,8 +20807,8 @@
         </p:nvSpPr>
         <p:spPr>
           <a:xfrm>
-            <a:off x="5349240" y="1783080"/>
-            <a:ext cx="6522415" cy="4663440"/>
+            <a:off x="4069080" y="1783080"/>
+            <a:ext cx="7802575" cy="4663440"/>
           </a:xfrm>
           <a:prstGeom prst="rect">
             <a:avLst/>
@@ -19603,7 +20828,7 @@
               <a:buChar char="•"/>
             </a:pPr>
             <a:r>
-              <a:rPr lang="en-US" sz="2000" dirty="0">
+              <a:rPr lang="en-US" sz="1800" dirty="0">
                 <a:solidFill>
                   <a:srgbClr val="111111"/>
                 </a:solidFill>
@@ -19611,9 +20836,9 @@
                 <a:ea typeface="Calibri" pitchFamily="34" charset="-122"/>
                 <a:cs typeface="Calibri" pitchFamily="34" charset="-120"/>
               </a:rPr>
-              <a:t>Timing: Homework correction, plan, objectives 8 min | Recall, situation, action 10 min | 5 activities 30 min | Board summary (copying) 30 min | Evaluation, remediation 10 min | Homework, next lesson 5 min | Logbook 7 min</a:t>
-            </a:r>
-            <a:endParaRPr lang="en-US" sz="2000" dirty="0"/>
+              <a:t>Geography Syllabus, Forms I–V, MINESEC (2023) — Form 4, Module II: Development and the Management of Primary Resources.</a:t>
+            </a:r>
+            <a:endParaRPr lang="en-US" sz="1800" dirty="0"/>
           </a:p>
           <a:p>
             <a:pPr algn="l" marL="342900" indent="-342900">
@@ -19624,7 +20849,7 @@
               <a:buChar char="•"/>
             </a:pPr>
             <a:r>
-              <a:rPr lang="en-US" sz="2000" dirty="0">
+              <a:rPr lang="en-US" sz="1800" dirty="0">
                 <a:solidFill>
                   <a:srgbClr val="111111"/>
                 </a:solidFill>
@@ -19632,9 +20857,9 @@
                 <a:ea typeface="Calibri" pitchFamily="34" charset="-122"/>
                 <a:cs typeface="Calibri" pitchFamily="34" charset="-120"/>
               </a:rPr>
-              <a:t>Without the projector (Activity 1): list exports.</a:t>
-            </a:r>
-            <a:endParaRPr lang="en-US" sz="2000" dirty="0"/>
+              <a:t>Photo, Activity 1: “Cotton harvest” by CIFOR, CC BY-NC-ND 2.0, via Flickr (https://www.flickr.com/photos/45423546@N07/35706862552)</a:t>
+            </a:r>
+            <a:endParaRPr lang="en-US" sz="1800" dirty="0"/>
           </a:p>
           <a:p>
             <a:pPr algn="l" marL="342900" indent="-342900">
@@ -19645,7 +20870,7 @@
               <a:buChar char="•"/>
             </a:pPr>
             <a:r>
-              <a:rPr lang="en-US" sz="2000" dirty="0">
+              <a:rPr lang="en-US" sz="1800" dirty="0">
                 <a:solidFill>
                   <a:srgbClr val="111111"/>
                 </a:solidFill>
@@ -19653,9 +20878,9 @@
                 <a:ea typeface="Calibri" pitchFamily="34" charset="-122"/>
                 <a:cs typeface="Calibri" pitchFamily="34" charset="-120"/>
               </a:rPr>
-              <a:t>Without the projector (Activity 2): name agro-industries.</a:t>
-            </a:r>
-            <a:endParaRPr lang="en-US" sz="2000" dirty="0"/>
+              <a:t>Photo, Activity 2: “Interior of Winston-Salem Chero-Cola Bottling Company, Winston-Salem, ” by unclibraries_commons, Public domain 1.0, via Flickr (https://www.flickr.com/photos/122654055@N06/22680169228)</a:t>
+            </a:r>
+            <a:endParaRPr lang="en-US" sz="1800" dirty="0"/>
           </a:p>
           <a:p>
             <a:pPr algn="l" marL="342900" indent="-342900">
@@ -19666,7 +20891,7 @@
               <a:buChar char="•"/>
             </a:pPr>
             <a:r>
-              <a:rPr lang="en-US" sz="2000" dirty="0">
+              <a:rPr lang="en-US" sz="1800" dirty="0">
                 <a:solidFill>
                   <a:srgbClr val="111111"/>
                 </a:solidFill>
@@ -19674,9 +20899,9 @@
                 <a:ea typeface="Calibri" pitchFamily="34" charset="-122"/>
                 <a:cs typeface="Calibri" pitchFamily="34" charset="-120"/>
               </a:rPr>
-              <a:t>Without the projector (Activity 3): discuss.</a:t>
-            </a:r>
-            <a:endParaRPr lang="en-US" sz="2000" dirty="0"/>
+              <a:t>Photo, Activity 3: “k4817-4” by USDAgov, CC BY 2.0, via Flickr (https://www.flickr.com/photos/41284017@N08/8497812386)</a:t>
+            </a:r>
+            <a:endParaRPr lang="en-US" sz="1800" dirty="0"/>
           </a:p>
           <a:p>
             <a:pPr algn="l" marL="342900" indent="-342900">
@@ -19687,7 +20912,7 @@
               <a:buChar char="•"/>
             </a:pPr>
             <a:r>
-              <a:rPr lang="en-US" sz="2000" dirty="0">
+              <a:rPr lang="en-US" sz="1800" dirty="0">
                 <a:solidFill>
                   <a:srgbClr val="111111"/>
                 </a:solidFill>
@@ -19695,9 +20920,9 @@
                 <a:ea typeface="Calibri" pitchFamily="34" charset="-122"/>
                 <a:cs typeface="Calibri" pitchFamily="34" charset="-120"/>
               </a:rPr>
-              <a:t>Without the projector (Activity 4): discuss.</a:t>
-            </a:r>
-            <a:endParaRPr lang="en-US" sz="2000" dirty="0"/>
+              <a:t>Photo, Activity 4: “Soil erosion in the central Mexican Highlands” by CIMMYT, CC BY-NC-SA 2.0, via Flickr (https://www.flickr.com/photos/44760652@N05/6244930288)</a:t>
+            </a:r>
+            <a:endParaRPr lang="en-US" sz="1800" dirty="0"/>
           </a:p>
           <a:p>
             <a:pPr algn="l" marL="342900" indent="-342900">
@@ -19708,7 +20933,7 @@
               <a:buChar char="•"/>
             </a:pPr>
             <a:r>
-              <a:rPr lang="en-US" sz="2000" dirty="0">
+              <a:rPr lang="en-US" sz="1800" dirty="0">
                 <a:solidFill>
                   <a:srgbClr val="111111"/>
                 </a:solidFill>
@@ -19716,9 +20941,9 @@
                 <a:ea typeface="Calibri" pitchFamily="34" charset="-122"/>
                 <a:cs typeface="Calibri" pitchFamily="34" charset="-120"/>
               </a:rPr>
-              <a:t>Without the projector (Activity 5): read the table.</a:t>
-            </a:r>
-            <a:endParaRPr lang="en-US" sz="2000" dirty="0"/>
+              <a:t>Diagrams and animations: drawn for this lesson (Geography Department).</a:t>
+            </a:r>
+            <a:endParaRPr lang="en-US" sz="1800" dirty="0"/>
           </a:p>
         </p:txBody>
       </p:sp>
@@ -19764,332 +20989,7 @@
             <a:pPr algn="ctr"/>
             <a:fld id="{F7021451-1387-4CA6-816F-3879F97B5CBC}" type="slidenum">
               <a:rPr b="1" lang="en-US"/>
-              <a:t>50</a:t>
-            </a:fld>
-            <a:endParaRPr lang="en-US"/>
-          </a:p>
-        </p:txBody>
-      </p:sp>
-    </p:spTree>
-  </p:cSld>
-  <p:clrMapOvr>
-    <a:masterClrMapping/>
-  </p:clrMapOvr>
-</p:sld>
-</file>
-
-<file path=ppt/slides/slide51.xml><?xml version="1.0" encoding="utf-8"?>
-<p:sld xmlns:a="http://schemas.openxmlformats.org/drawingml/2006/main" xmlns:r="http://schemas.openxmlformats.org/officeDocument/2006/relationships" xmlns:p="http://schemas.openxmlformats.org/presentationml/2006/main">
-  <p:cSld name="Slide 51">
-    <p:spTree>
-      <p:nvGrpSpPr>
-        <p:cNvPr id="1" name=""/>
-        <p:cNvGrpSpPr/>
-        <p:nvPr/>
-      </p:nvGrpSpPr>
-      <p:grpSpPr>
-        <a:xfrm>
-          <a:off x="0" y="0"/>
-          <a:ext cx="0" cy="0"/>
-          <a:chOff x="0" y="0"/>
-          <a:chExt cx="0" cy="0"/>
-        </a:xfrm>
-      </p:grpSpPr>
-      <p:sp>
-        <p:nvSpPr>
-          <p:cNvPr id="2" name="Text 0"/>
-          <p:cNvSpPr/>
-          <p:nvPr/>
-        </p:nvSpPr>
-        <p:spPr>
-          <a:xfrm>
-            <a:off x="457200" y="713232"/>
-            <a:ext cx="11368735" cy="274320"/>
-          </a:xfrm>
-          <a:prstGeom prst="rect">
-            <a:avLst/>
-          </a:prstGeom>
-          <a:noFill/>
-          <a:ln/>
-        </p:spPr>
-        <p:txBody>
-          <a:bodyPr wrap="square" lIns="0" tIns="0" rIns="0" bIns="0" rtlCol="0" anchor="ctr"/>
-          <a:lstStyle/>
-          <a:p>
-            <a:pPr algn="r" indent="0" marL="0">
-              <a:buNone/>
-            </a:pPr>
-            <a:r>
-              <a:rPr lang="en-US" sz="1400" b="1" dirty="0">
-                <a:solidFill>
-                  <a:srgbClr val="1C3F6E"/>
-                </a:solidFill>
-                <a:latin typeface="Calibri" pitchFamily="34" charset="0"/>
-                <a:ea typeface="Calibri" pitchFamily="34" charset="-122"/>
-                <a:cs typeface="Calibri" pitchFamily="34" charset="-120"/>
-              </a:rPr>
-              <a:t>REFERENCES</a:t>
-            </a:r>
-            <a:endParaRPr lang="en-US" sz="1400" dirty="0"/>
-          </a:p>
-        </p:txBody>
-      </p:sp>
-      <p:pic>
-        <p:nvPicPr>
-          <p:cNvPr id="3" name="Image 0" descr="/home/claude/f4/img/minesec_sheet.png">    </p:cNvPr>
-          <p:cNvPicPr>
-            <a:picLocks noChangeAspect="1"/>
-          </p:cNvPicPr>
-          <p:nvPr/>
-        </p:nvPicPr>
-        <p:blipFill>
-          <a:blip r:embed="rId1"/>
-          <a:stretch>
-            <a:fillRect/>
-          </a:stretch>
-        </p:blipFill>
-        <p:spPr>
-          <a:xfrm>
-            <a:off x="0" y="658368"/>
-            <a:ext cx="3840480" cy="5833872"/>
-          </a:xfrm>
-          <a:prstGeom prst="rect">
-            <a:avLst/>
-          </a:prstGeom>
-        </p:spPr>
-      </p:pic>
-      <p:sp>
-        <p:nvSpPr>
-          <p:cNvPr id="4" name="Text 1"/>
-          <p:cNvSpPr/>
-          <p:nvPr/>
-        </p:nvSpPr>
-        <p:spPr>
-          <a:xfrm>
-            <a:off x="4069080" y="1005840"/>
-            <a:ext cx="7802575" cy="731520"/>
-          </a:xfrm>
-          <a:prstGeom prst="rect">
-            <a:avLst/>
-          </a:prstGeom>
-          <a:noFill/>
-          <a:ln/>
-        </p:spPr>
-        <p:txBody>
-          <a:bodyPr wrap="square" lIns="0" tIns="0" rIns="0" bIns="0" rtlCol="0" anchor="ctr">
-            <a:normAutofit/>
-          </a:bodyPr>
-          <a:lstStyle/>
-          <a:p>
-            <a:pPr algn="ctr" indent="0" marL="0">
-              <a:buNone/>
-            </a:pPr>
-            <a:r>
-              <a:rPr lang="en-US" sz="3600" b="1" dirty="0">
-                <a:solidFill>
-                  <a:srgbClr val="990011"/>
-                </a:solidFill>
-                <a:latin typeface="Times New Roman" pitchFamily="34" charset="0"/>
-                <a:ea typeface="Times New Roman" pitchFamily="34" charset="-122"/>
-                <a:cs typeface="Times New Roman" pitchFamily="34" charset="-120"/>
-              </a:rPr>
-              <a:t>References</a:t>
-            </a:r>
-            <a:endParaRPr lang="en-US" sz="3600" dirty="0"/>
-          </a:p>
-        </p:txBody>
-      </p:sp>
-      <p:sp>
-        <p:nvSpPr>
-          <p:cNvPr id="5" name="Text 2"/>
-          <p:cNvSpPr/>
-          <p:nvPr/>
-        </p:nvSpPr>
-        <p:spPr>
-          <a:xfrm>
-            <a:off x="4069080" y="1783080"/>
-            <a:ext cx="7802575" cy="4663440"/>
-          </a:xfrm>
-          <a:prstGeom prst="rect">
-            <a:avLst/>
-          </a:prstGeom>
-          <a:noFill/>
-          <a:ln/>
-        </p:spPr>
-        <p:txBody>
-          <a:bodyPr wrap="square" lIns="0" tIns="0" rIns="0" bIns="0" rtlCol="0" anchor="t"/>
-          <a:lstStyle/>
-          <a:p>
-            <a:pPr algn="l" marL="342900" indent="-342900">
-              <a:spcAft>
-                <a:spcPts val="800"/>
-              </a:spcAft>
-              <a:buSzPct val="100000"/>
-              <a:buChar char="•"/>
-            </a:pPr>
-            <a:r>
-              <a:rPr lang="en-US" sz="1800" dirty="0">
-                <a:solidFill>
-                  <a:srgbClr val="111111"/>
-                </a:solidFill>
-                <a:latin typeface="Calibri" pitchFamily="34" charset="0"/>
-                <a:ea typeface="Calibri" pitchFamily="34" charset="-122"/>
-                <a:cs typeface="Calibri" pitchFamily="34" charset="-120"/>
-              </a:rPr>
-              <a:t>Geography Syllabus, Forms I–V, MINESEC (2023) — Form 4, Module II: Development and the Management of Primary Resources.</a:t>
-            </a:r>
-            <a:endParaRPr lang="en-US" sz="1800" dirty="0"/>
-          </a:p>
-          <a:p>
-            <a:pPr algn="l" marL="342900" indent="-342900">
-              <a:spcAft>
-                <a:spcPts val="800"/>
-              </a:spcAft>
-              <a:buSzPct val="100000"/>
-              <a:buChar char="•"/>
-            </a:pPr>
-            <a:r>
-              <a:rPr lang="en-US" sz="1800" dirty="0">
-                <a:solidFill>
-                  <a:srgbClr val="111111"/>
-                </a:solidFill>
-                <a:latin typeface="Calibri" pitchFamily="34" charset="0"/>
-                <a:ea typeface="Calibri" pitchFamily="34" charset="-122"/>
-                <a:cs typeface="Calibri" pitchFamily="34" charset="-120"/>
-              </a:rPr>
-              <a:t>Photo, Activity 1: “Cotton harvest” by CIFOR, CC BY-NC-ND 2.0, via Flickr (https://www.flickr.com/photos/45423546@N07/35706862552)</a:t>
-            </a:r>
-            <a:endParaRPr lang="en-US" sz="1800" dirty="0"/>
-          </a:p>
-          <a:p>
-            <a:pPr algn="l" marL="342900" indent="-342900">
-              <a:spcAft>
-                <a:spcPts val="800"/>
-              </a:spcAft>
-              <a:buSzPct val="100000"/>
-              <a:buChar char="•"/>
-            </a:pPr>
-            <a:r>
-              <a:rPr lang="en-US" sz="1800" dirty="0">
-                <a:solidFill>
-                  <a:srgbClr val="111111"/>
-                </a:solidFill>
-                <a:latin typeface="Calibri" pitchFamily="34" charset="0"/>
-                <a:ea typeface="Calibri" pitchFamily="34" charset="-122"/>
-                <a:cs typeface="Calibri" pitchFamily="34" charset="-120"/>
-              </a:rPr>
-              <a:t>Photo, Activity 2: “Interior of Winston-Salem Chero-Cola Bottling Company, Winston-Salem, ” by unclibraries_commons, Public domain 1.0, via Flickr (https://www.flickr.com/photos/122654055@N06/22680169228)</a:t>
-            </a:r>
-            <a:endParaRPr lang="en-US" sz="1800" dirty="0"/>
-          </a:p>
-          <a:p>
-            <a:pPr algn="l" marL="342900" indent="-342900">
-              <a:spcAft>
-                <a:spcPts val="800"/>
-              </a:spcAft>
-              <a:buSzPct val="100000"/>
-              <a:buChar char="•"/>
-            </a:pPr>
-            <a:r>
-              <a:rPr lang="en-US" sz="1800" dirty="0">
-                <a:solidFill>
-                  <a:srgbClr val="111111"/>
-                </a:solidFill>
-                <a:latin typeface="Calibri" pitchFamily="34" charset="0"/>
-                <a:ea typeface="Calibri" pitchFamily="34" charset="-122"/>
-                <a:cs typeface="Calibri" pitchFamily="34" charset="-120"/>
-              </a:rPr>
-              <a:t>Photo, Activity 3: “k4817-4” by USDAgov, CC BY 2.0, via Flickr (https://www.flickr.com/photos/41284017@N08/8497812386)</a:t>
-            </a:r>
-            <a:endParaRPr lang="en-US" sz="1800" dirty="0"/>
-          </a:p>
-          <a:p>
-            <a:pPr algn="l" marL="342900" indent="-342900">
-              <a:spcAft>
-                <a:spcPts val="800"/>
-              </a:spcAft>
-              <a:buSzPct val="100000"/>
-              <a:buChar char="•"/>
-            </a:pPr>
-            <a:r>
-              <a:rPr lang="en-US" sz="1800" dirty="0">
-                <a:solidFill>
-                  <a:srgbClr val="111111"/>
-                </a:solidFill>
-                <a:latin typeface="Calibri" pitchFamily="34" charset="0"/>
-                <a:ea typeface="Calibri" pitchFamily="34" charset="-122"/>
-                <a:cs typeface="Calibri" pitchFamily="34" charset="-120"/>
-              </a:rPr>
-              <a:t>Photo, Activity 4: “Soil erosion in the central Mexican Highlands” by CIMMYT, CC BY-NC-SA 2.0, via Flickr (https://www.flickr.com/photos/44760652@N05/6244930288)</a:t>
-            </a:r>
-            <a:endParaRPr lang="en-US" sz="1800" dirty="0"/>
-          </a:p>
-          <a:p>
-            <a:pPr algn="l" marL="342900" indent="-342900">
-              <a:spcAft>
-                <a:spcPts val="800"/>
-              </a:spcAft>
-              <a:buSzPct val="100000"/>
-              <a:buChar char="•"/>
-            </a:pPr>
-            <a:r>
-              <a:rPr lang="en-US" sz="1800" dirty="0">
-                <a:solidFill>
-                  <a:srgbClr val="111111"/>
-                </a:solidFill>
-                <a:latin typeface="Calibri" pitchFamily="34" charset="0"/>
-                <a:ea typeface="Calibri" pitchFamily="34" charset="-122"/>
-                <a:cs typeface="Calibri" pitchFamily="34" charset="-120"/>
-              </a:rPr>
-              <a:t>Diagrams and animations: drawn for this lesson (Geography Department).</a:t>
-            </a:r>
-            <a:endParaRPr lang="en-US" sz="1800" dirty="0"/>
-          </a:p>
-        </p:txBody>
-      </p:sp>
-      <p:sp>
-        <p:nvSpPr>
-          <p:cNvPr id="25" name="Slide Number Placeholder 0"/>
-          <p:cNvSpPr>
-            <a:spLocks noGrp="1"/>
-          </p:cNvSpPr>
-          <p:nvPr>
-            <p:ph type="sldNum" sz="quarter" idx="4294967295"/>
-          </p:nvPr>
-        </p:nvSpPr>
-        <p:spPr>
-          <a:xfrm>
-            <a:off x="27432" y="91440"/>
-            <a:ext cx="585216" cy="475488"/>
-          </a:xfrm>
-          <a:prstGeom prst="rect">
-            <a:avLst/>
-          </a:prstGeom>
-          <a:extLst>
-            <a:ext uri="{C572A759-6A51-4108-AA02-DFA0A04FC94B}">
-              <ma14:wrappingTextBoxFlag xmlns:ma14="http://schemas.microsoft.com/office/mac/drawingml/2011/main" val="0"/>
-            </a:ext>
-          </a:extLst>
-        </p:spPr>
-        <p:txBody>
-          <a:bodyPr/>
-          <a:lstStyle>
-            <a:lvl1pPr>
-              <a:defRPr sz="2000">
-                <a:solidFill>
-                  <a:srgbClr val="FFFFFF"/>
-                </a:solidFill>
-                <a:latin typeface="Calibri"/>
-                <a:ea typeface="Calibri"/>
-                <a:cs typeface="Calibri"/>
-              </a:defRPr>
-            </a:lvl1pPr>
-          </a:lstStyle>
-          <a:p>
-            <a:pPr algn="ctr"/>
-            <a:fld id="{F7021451-1387-4CA6-816F-3879F97B5CBC}" type="slidenum">
-              <a:rPr b="1" lang="en-US"/>
-              <a:t>51</a:t>
+              <a:t>53</a:t>
             </a:fld>
             <a:endParaRPr lang="en-US"/>
           </a:p>
